--- a/Tuan_1/Báo cáo tuần 1.pptx
+++ b/Tuan_1/Báo cáo tuần 1.pptx
@@ -9,6 +9,32 @@
     <p:sldId id="257" r:id="rId3"/>
     <p:sldId id="259" r:id="rId4"/>
     <p:sldId id="260" r:id="rId5"/>
+    <p:sldId id="261" r:id="rId6"/>
+    <p:sldId id="262" r:id="rId7"/>
+    <p:sldId id="263" r:id="rId8"/>
+    <p:sldId id="265" r:id="rId9"/>
+    <p:sldId id="264" r:id="rId10"/>
+    <p:sldId id="266" r:id="rId11"/>
+    <p:sldId id="267" r:id="rId12"/>
+    <p:sldId id="268" r:id="rId13"/>
+    <p:sldId id="269" r:id="rId14"/>
+    <p:sldId id="271" r:id="rId15"/>
+    <p:sldId id="270" r:id="rId16"/>
+    <p:sldId id="272" r:id="rId17"/>
+    <p:sldId id="273" r:id="rId18"/>
+    <p:sldId id="275" r:id="rId19"/>
+    <p:sldId id="274" r:id="rId20"/>
+    <p:sldId id="277" r:id="rId21"/>
+    <p:sldId id="278" r:id="rId22"/>
+    <p:sldId id="279" r:id="rId23"/>
+    <p:sldId id="280" r:id="rId24"/>
+    <p:sldId id="282" r:id="rId25"/>
+    <p:sldId id="283" r:id="rId26"/>
+    <p:sldId id="285" r:id="rId27"/>
+    <p:sldId id="281" r:id="rId28"/>
+    <p:sldId id="286" r:id="rId29"/>
+    <p:sldId id="288" r:id="rId30"/>
+    <p:sldId id="289" r:id="rId31"/>
   </p:sldIdLst>
   <p:sldSz cx="12192000" cy="6858000"/>
   <p:notesSz cx="6858000" cy="9144000"/>
@@ -107,6 +133,11 @@
       </a:defRPr>
     </a:lvl9pPr>
   </p:defaultTextStyle>
+  <p:extLst>
+    <p:ext uri="{EFAFB233-063F-42B5-8137-9DF3F51BA10A}">
+      <p15:sldGuideLst xmlns:p15="http://schemas.microsoft.com/office/powerpoint/2012/main"/>
+    </p:ext>
+  </p:extLst>
 </p:presentation>
 </file>
 
@@ -3029,6 +3060,2158 @@
 </p:sld>
 </file>
 
+<file path=ppt/slides/slide10.xml><?xml version="1.0" encoding="utf-8"?>
+<p:sld xmlns:a="http://schemas.openxmlformats.org/drawingml/2006/main" xmlns:r="http://schemas.openxmlformats.org/officeDocument/2006/relationships" xmlns:p="http://schemas.openxmlformats.org/presentationml/2006/main">
+  <p:cSld>
+    <p:spTree>
+      <p:nvGrpSpPr>
+        <p:cNvPr id="1" name=""/>
+        <p:cNvGrpSpPr/>
+        <p:nvPr/>
+      </p:nvGrpSpPr>
+      <p:grpSpPr>
+        <a:xfrm>
+          <a:off x="0" y="0"/>
+          <a:ext cx="0" cy="0"/>
+          <a:chOff x="0" y="0"/>
+          <a:chExt cx="0" cy="0"/>
+        </a:xfrm>
+      </p:grpSpPr>
+      <p:sp>
+        <p:nvSpPr>
+          <p:cNvPr id="2" name="Title 1"/>
+          <p:cNvSpPr>
+            <a:spLocks noGrp="1"/>
+          </p:cNvSpPr>
+          <p:nvPr>
+            <p:ph type="title"/>
+          </p:nvPr>
+        </p:nvSpPr>
+        <p:spPr/>
+        <p:txBody>
+          <a:bodyPr/>
+          <a:lstStyle/>
+          <a:p>
+            <a:endParaRPr lang="en-US"/>
+          </a:p>
+        </p:txBody>
+      </p:sp>
+      <p:pic>
+        <p:nvPicPr>
+          <p:cNvPr id="4" name="Content Placeholder 3"/>
+          <p:cNvPicPr>
+            <a:picLocks noGrp="1" noChangeAspect="1"/>
+          </p:cNvPicPr>
+          <p:nvPr>
+            <p:ph idx="1"/>
+          </p:nvPr>
+        </p:nvPicPr>
+        <p:blipFill>
+          <a:blip r:embed="rId2">
+            <a:extLst>
+              <a:ext uri="{28A0092B-C50C-407E-A947-70E740481C1C}">
+                <a14:useLocalDpi xmlns:a14="http://schemas.microsoft.com/office/drawing/2010/main" val="0"/>
+              </a:ext>
+            </a:extLst>
+          </a:blip>
+          <a:stretch>
+            <a:fillRect/>
+          </a:stretch>
+        </p:blipFill>
+        <p:spPr>
+          <a:xfrm>
+            <a:off x="5306292" y="365125"/>
+            <a:ext cx="6472843" cy="3640974"/>
+          </a:xfrm>
+        </p:spPr>
+      </p:pic>
+      <p:pic>
+        <p:nvPicPr>
+          <p:cNvPr id="6" name="Picture 5"/>
+          <p:cNvPicPr>
+            <a:picLocks noChangeAspect="1"/>
+          </p:cNvPicPr>
+          <p:nvPr/>
+        </p:nvPicPr>
+        <p:blipFill>
+          <a:blip r:embed="rId3">
+            <a:extLst>
+              <a:ext uri="{28A0092B-C50C-407E-A947-70E740481C1C}">
+                <a14:useLocalDpi xmlns:a14="http://schemas.microsoft.com/office/drawing/2010/main" val="0"/>
+              </a:ext>
+            </a:extLst>
+          </a:blip>
+          <a:stretch>
+            <a:fillRect/>
+          </a:stretch>
+        </p:blipFill>
+        <p:spPr>
+          <a:xfrm>
+            <a:off x="573577" y="2466009"/>
+            <a:ext cx="4167447" cy="2778298"/>
+          </a:xfrm>
+          <a:prstGeom prst="rect">
+            <a:avLst/>
+          </a:prstGeom>
+        </p:spPr>
+      </p:pic>
+      <p:sp>
+        <p:nvSpPr>
+          <p:cNvPr id="7" name="TextBox 6"/>
+          <p:cNvSpPr txBox="1"/>
+          <p:nvPr/>
+        </p:nvSpPr>
+        <p:spPr>
+          <a:xfrm>
+            <a:off x="1794275" y="5315991"/>
+            <a:ext cx="1726050" cy="369332"/>
+          </a:xfrm>
+          <a:prstGeom prst="rect">
+            <a:avLst/>
+          </a:prstGeom>
+          <a:noFill/>
+        </p:spPr>
+        <p:txBody>
+          <a:bodyPr wrap="none" rtlCol="0">
+            <a:spAutoFit/>
+          </a:bodyPr>
+          <a:lstStyle/>
+          <a:p>
+            <a:r>
+              <a:rPr lang="en-US" i="1" dirty="0" err="1" smtClean="0">
+                <a:solidFill>
+                  <a:schemeClr val="tx1">
+                    <a:lumMod val="65000"/>
+                    <a:lumOff val="35000"/>
+                  </a:schemeClr>
+                </a:solidFill>
+              </a:rPr>
+              <a:t>Xe</a:t>
+            </a:r>
+            <a:r>
+              <a:rPr lang="en-US" i="1" dirty="0" smtClean="0">
+                <a:solidFill>
+                  <a:schemeClr val="tx1">
+                    <a:lumMod val="65000"/>
+                    <a:lumOff val="35000"/>
+                  </a:schemeClr>
+                </a:solidFill>
+              </a:rPr>
+              <a:t> </a:t>
+            </a:r>
+            <a:r>
+              <a:rPr lang="en-US" i="1" dirty="0" err="1" smtClean="0">
+                <a:solidFill>
+                  <a:schemeClr val="tx1">
+                    <a:lumMod val="65000"/>
+                    <a:lumOff val="35000"/>
+                  </a:schemeClr>
+                </a:solidFill>
+              </a:rPr>
+              <a:t>tự</a:t>
+            </a:r>
+            <a:r>
+              <a:rPr lang="en-US" i="1" dirty="0" smtClean="0">
+                <a:solidFill>
+                  <a:schemeClr val="tx1">
+                    <a:lumMod val="65000"/>
+                    <a:lumOff val="35000"/>
+                  </a:schemeClr>
+                </a:solidFill>
+              </a:rPr>
+              <a:t> </a:t>
+            </a:r>
+            <a:r>
+              <a:rPr lang="en-US" i="1" dirty="0" err="1" smtClean="0">
+                <a:solidFill>
+                  <a:schemeClr val="tx1">
+                    <a:lumMod val="65000"/>
+                    <a:lumOff val="35000"/>
+                  </a:schemeClr>
+                </a:solidFill>
+              </a:rPr>
+              <a:t>lái</a:t>
+            </a:r>
+            <a:r>
+              <a:rPr lang="en-US" i="1" dirty="0" smtClean="0">
+                <a:solidFill>
+                  <a:schemeClr val="tx1">
+                    <a:lumMod val="65000"/>
+                    <a:lumOff val="35000"/>
+                  </a:schemeClr>
+                </a:solidFill>
+              </a:rPr>
+              <a:t> </a:t>
+            </a:r>
+            <a:r>
+              <a:rPr lang="en-US" i="1" dirty="0" err="1" smtClean="0">
+                <a:solidFill>
+                  <a:schemeClr val="tx1">
+                    <a:lumMod val="65000"/>
+                    <a:lumOff val="35000"/>
+                  </a:schemeClr>
+                </a:solidFill>
+              </a:rPr>
+              <a:t>Waymo</a:t>
+            </a:r>
+            <a:endParaRPr lang="en-US" i="1" dirty="0">
+              <a:solidFill>
+                <a:schemeClr val="tx1">
+                  <a:lumMod val="65000"/>
+                  <a:lumOff val="35000"/>
+                </a:schemeClr>
+              </a:solidFill>
+            </a:endParaRPr>
+          </a:p>
+        </p:txBody>
+      </p:sp>
+      <p:sp>
+        <p:nvSpPr>
+          <p:cNvPr id="8" name="TextBox 7"/>
+          <p:cNvSpPr txBox="1"/>
+          <p:nvPr/>
+        </p:nvSpPr>
+        <p:spPr>
+          <a:xfrm>
+            <a:off x="7077279" y="4135584"/>
+            <a:ext cx="2930867" cy="369332"/>
+          </a:xfrm>
+          <a:prstGeom prst="rect">
+            <a:avLst/>
+          </a:prstGeom>
+          <a:noFill/>
+        </p:spPr>
+        <p:txBody>
+          <a:bodyPr wrap="none" rtlCol="0">
+            <a:spAutoFit/>
+          </a:bodyPr>
+          <a:lstStyle/>
+          <a:p>
+            <a:r>
+              <a:rPr lang="en-US" i="1" dirty="0" err="1" smtClean="0">
+                <a:solidFill>
+                  <a:schemeClr val="tx1">
+                    <a:lumMod val="65000"/>
+                    <a:lumOff val="35000"/>
+                  </a:schemeClr>
+                </a:solidFill>
+              </a:rPr>
+              <a:t>Trợ</a:t>
+            </a:r>
+            <a:r>
+              <a:rPr lang="en-US" i="1" dirty="0" smtClean="0">
+                <a:solidFill>
+                  <a:schemeClr val="tx1">
+                    <a:lumMod val="65000"/>
+                    <a:lumOff val="35000"/>
+                  </a:schemeClr>
+                </a:solidFill>
+              </a:rPr>
+              <a:t> </a:t>
+            </a:r>
+            <a:r>
+              <a:rPr lang="en-US" i="1" dirty="0" err="1" smtClean="0">
+                <a:solidFill>
+                  <a:schemeClr val="tx1">
+                    <a:lumMod val="65000"/>
+                    <a:lumOff val="35000"/>
+                  </a:schemeClr>
+                </a:solidFill>
+              </a:rPr>
+              <a:t>lý</a:t>
+            </a:r>
+            <a:r>
+              <a:rPr lang="en-US" i="1" dirty="0" smtClean="0">
+                <a:solidFill>
+                  <a:schemeClr val="tx1">
+                    <a:lumMod val="65000"/>
+                    <a:lumOff val="35000"/>
+                  </a:schemeClr>
+                </a:solidFill>
+              </a:rPr>
+              <a:t> </a:t>
+            </a:r>
+            <a:r>
+              <a:rPr lang="en-US" i="1" dirty="0" err="1" smtClean="0">
+                <a:solidFill>
+                  <a:schemeClr val="tx1">
+                    <a:lumMod val="65000"/>
+                    <a:lumOff val="35000"/>
+                  </a:schemeClr>
+                </a:solidFill>
+              </a:rPr>
+              <a:t>trí</a:t>
+            </a:r>
+            <a:r>
+              <a:rPr lang="en-US" i="1" dirty="0" smtClean="0">
+                <a:solidFill>
+                  <a:schemeClr val="tx1">
+                    <a:lumMod val="65000"/>
+                    <a:lumOff val="35000"/>
+                  </a:schemeClr>
+                </a:solidFill>
+              </a:rPr>
+              <a:t> </a:t>
+            </a:r>
+            <a:r>
+              <a:rPr lang="en-US" i="1" dirty="0" err="1" smtClean="0">
+                <a:solidFill>
+                  <a:schemeClr val="tx1">
+                    <a:lumMod val="65000"/>
+                    <a:lumOff val="35000"/>
+                  </a:schemeClr>
+                </a:solidFill>
+              </a:rPr>
+              <a:t>tuệ</a:t>
+            </a:r>
+            <a:r>
+              <a:rPr lang="en-US" i="1" dirty="0" smtClean="0">
+                <a:solidFill>
+                  <a:schemeClr val="tx1">
+                    <a:lumMod val="65000"/>
+                    <a:lumOff val="35000"/>
+                  </a:schemeClr>
+                </a:solidFill>
+              </a:rPr>
+              <a:t> </a:t>
+            </a:r>
+            <a:r>
+              <a:rPr lang="en-US" i="1" dirty="0" err="1" smtClean="0">
+                <a:solidFill>
+                  <a:schemeClr val="tx1">
+                    <a:lumMod val="65000"/>
+                    <a:lumOff val="35000"/>
+                  </a:schemeClr>
+                </a:solidFill>
+              </a:rPr>
+              <a:t>nhân</a:t>
+            </a:r>
+            <a:r>
+              <a:rPr lang="en-US" i="1" dirty="0" smtClean="0">
+                <a:solidFill>
+                  <a:schemeClr val="tx1">
+                    <a:lumMod val="65000"/>
+                    <a:lumOff val="35000"/>
+                  </a:schemeClr>
+                </a:solidFill>
+              </a:rPr>
+              <a:t> </a:t>
+            </a:r>
+            <a:r>
+              <a:rPr lang="en-US" i="1" dirty="0" err="1" smtClean="0">
+                <a:solidFill>
+                  <a:schemeClr val="tx1">
+                    <a:lumMod val="65000"/>
+                    <a:lumOff val="35000"/>
+                  </a:schemeClr>
+                </a:solidFill>
+              </a:rPr>
+              <a:t>tạo</a:t>
+            </a:r>
+            <a:r>
+              <a:rPr lang="en-US" i="1" dirty="0" smtClean="0">
+                <a:solidFill>
+                  <a:schemeClr val="tx1">
+                    <a:lumMod val="65000"/>
+                    <a:lumOff val="35000"/>
+                  </a:schemeClr>
+                </a:solidFill>
+              </a:rPr>
+              <a:t> Gemini</a:t>
+            </a:r>
+            <a:endParaRPr lang="en-US" i="1" dirty="0">
+              <a:solidFill>
+                <a:schemeClr val="tx1">
+                  <a:lumMod val="65000"/>
+                  <a:lumOff val="35000"/>
+                </a:schemeClr>
+              </a:solidFill>
+            </a:endParaRPr>
+          </a:p>
+        </p:txBody>
+      </p:sp>
+    </p:spTree>
+    <p:extLst>
+      <p:ext uri="{BB962C8B-B14F-4D97-AF65-F5344CB8AC3E}">
+        <p14:creationId xmlns:p14="http://schemas.microsoft.com/office/powerpoint/2010/main" val="1497329408"/>
+      </p:ext>
+    </p:extLst>
+  </p:cSld>
+  <p:clrMapOvr>
+    <a:masterClrMapping/>
+  </p:clrMapOvr>
+  <p:timing>
+    <p:tnLst>
+      <p:par>
+        <p:cTn id="1" dur="indefinite" restart="never" nodeType="tmRoot"/>
+      </p:par>
+    </p:tnLst>
+  </p:timing>
+</p:sld>
+</file>
+
+<file path=ppt/slides/slide11.xml><?xml version="1.0" encoding="utf-8"?>
+<p:sld xmlns:a="http://schemas.openxmlformats.org/drawingml/2006/main" xmlns:r="http://schemas.openxmlformats.org/officeDocument/2006/relationships" xmlns:p="http://schemas.openxmlformats.org/presentationml/2006/main">
+  <p:cSld>
+    <p:spTree>
+      <p:nvGrpSpPr>
+        <p:cNvPr id="1" name=""/>
+        <p:cNvGrpSpPr/>
+        <p:nvPr/>
+      </p:nvGrpSpPr>
+      <p:grpSpPr>
+        <a:xfrm>
+          <a:off x="0" y="0"/>
+          <a:ext cx="0" cy="0"/>
+          <a:chOff x="0" y="0"/>
+          <a:chExt cx="0" cy="0"/>
+        </a:xfrm>
+      </p:grpSpPr>
+      <p:sp>
+        <p:nvSpPr>
+          <p:cNvPr id="2" name="Title 1"/>
+          <p:cNvSpPr>
+            <a:spLocks noGrp="1"/>
+          </p:cNvSpPr>
+          <p:nvPr>
+            <p:ph type="title"/>
+          </p:nvPr>
+        </p:nvSpPr>
+        <p:spPr/>
+        <p:txBody>
+          <a:bodyPr/>
+          <a:lstStyle/>
+          <a:p>
+            <a:r>
+              <a:rPr lang="en-US" b="1" dirty="0"/>
+              <a:t>1. </a:t>
+            </a:r>
+            <a:r>
+              <a:rPr lang="en-US" b="1" dirty="0" err="1"/>
+              <a:t>Giới</a:t>
+            </a:r>
+            <a:r>
+              <a:rPr lang="en-US" b="1" dirty="0"/>
+              <a:t> </a:t>
+            </a:r>
+            <a:r>
+              <a:rPr lang="en-US" b="1" dirty="0" err="1"/>
+              <a:t>thiệu</a:t>
+            </a:r>
+            <a:r>
+              <a:rPr lang="en-US" b="1" dirty="0"/>
+              <a:t> </a:t>
+            </a:r>
+            <a:r>
+              <a:rPr lang="en-US" b="1" dirty="0" err="1"/>
+              <a:t>về</a:t>
+            </a:r>
+            <a:r>
+              <a:rPr lang="en-US" b="1" dirty="0"/>
+              <a:t> AI</a:t>
+            </a:r>
+            <a:endParaRPr lang="en-US" b="1" dirty="0"/>
+          </a:p>
+        </p:txBody>
+      </p:sp>
+      <p:sp>
+        <p:nvSpPr>
+          <p:cNvPr id="3" name="Content Placeholder 2"/>
+          <p:cNvSpPr>
+            <a:spLocks noGrp="1"/>
+          </p:cNvSpPr>
+          <p:nvPr>
+            <p:ph idx="1"/>
+          </p:nvPr>
+        </p:nvSpPr>
+        <p:spPr/>
+        <p:txBody>
+          <a:bodyPr/>
+          <a:lstStyle/>
+          <a:p>
+            <a:r>
+              <a:rPr lang="en-US" dirty="0" err="1" smtClean="0"/>
+              <a:t>Khái</a:t>
+            </a:r>
+            <a:r>
+              <a:rPr lang="en-US" dirty="0" smtClean="0"/>
+              <a:t> </a:t>
+            </a:r>
+            <a:r>
+              <a:rPr lang="en-US" dirty="0" err="1" smtClean="0"/>
+              <a:t>niệm</a:t>
+            </a:r>
+            <a:endParaRPr lang="en-US" dirty="0" smtClean="0"/>
+          </a:p>
+          <a:p>
+            <a:r>
+              <a:rPr lang="en-US" dirty="0" err="1" smtClean="0"/>
+              <a:t>Lĩnh</a:t>
+            </a:r>
+            <a:r>
+              <a:rPr lang="en-US" dirty="0" smtClean="0"/>
+              <a:t> </a:t>
+            </a:r>
+            <a:r>
+              <a:rPr lang="en-US" dirty="0" err="1" smtClean="0"/>
+              <a:t>vực</a:t>
+            </a:r>
+            <a:r>
+              <a:rPr lang="en-US" dirty="0" smtClean="0"/>
+              <a:t> </a:t>
+            </a:r>
+            <a:r>
+              <a:rPr lang="en-US" dirty="0" err="1" smtClean="0"/>
+              <a:t>chính</a:t>
+            </a:r>
+            <a:r>
+              <a:rPr lang="en-US" dirty="0" smtClean="0"/>
+              <a:t>: ML, DL, NLP, Computer Vision, Robotics</a:t>
+            </a:r>
+          </a:p>
+          <a:p>
+            <a:r>
+              <a:rPr lang="en-US" dirty="0" err="1" smtClean="0"/>
+              <a:t>Ứng</a:t>
+            </a:r>
+            <a:r>
+              <a:rPr lang="en-US" dirty="0" smtClean="0"/>
+              <a:t> </a:t>
+            </a:r>
+            <a:r>
+              <a:rPr lang="en-US" dirty="0" err="1" smtClean="0"/>
+              <a:t>dụng</a:t>
+            </a:r>
+            <a:r>
+              <a:rPr lang="en-US" dirty="0" smtClean="0"/>
+              <a:t> </a:t>
+            </a:r>
+            <a:r>
+              <a:rPr lang="en-US" dirty="0" err="1" smtClean="0"/>
+              <a:t>của</a:t>
+            </a:r>
+            <a:r>
+              <a:rPr lang="en-US" dirty="0" smtClean="0"/>
+              <a:t> AI</a:t>
+            </a:r>
+            <a:endParaRPr lang="en-US" dirty="0"/>
+          </a:p>
+          <a:p>
+            <a:r>
+              <a:rPr lang="en-US" dirty="0" err="1" smtClean="0"/>
+              <a:t>Dữ</a:t>
+            </a:r>
+            <a:r>
+              <a:rPr lang="en-US" dirty="0" smtClean="0"/>
+              <a:t> </a:t>
+            </a:r>
+            <a:r>
+              <a:rPr lang="en-US" dirty="0" err="1" smtClean="0"/>
+              <a:t>liệu</a:t>
+            </a:r>
+            <a:r>
+              <a:rPr lang="en-US" dirty="0" smtClean="0"/>
+              <a:t>: </a:t>
+            </a:r>
+            <a:r>
+              <a:rPr lang="en-US" dirty="0" err="1" smtClean="0"/>
+              <a:t>Khái</a:t>
+            </a:r>
+            <a:r>
+              <a:rPr lang="en-US" dirty="0" smtClean="0"/>
+              <a:t> </a:t>
+            </a:r>
+            <a:r>
+              <a:rPr lang="en-US" dirty="0" err="1" smtClean="0"/>
+              <a:t>niệm</a:t>
+            </a:r>
+            <a:r>
+              <a:rPr lang="en-US" dirty="0" smtClean="0"/>
+              <a:t> </a:t>
+            </a:r>
+            <a:r>
+              <a:rPr lang="en-US" dirty="0" err="1" smtClean="0"/>
+              <a:t>và</a:t>
+            </a:r>
+            <a:r>
+              <a:rPr lang="en-US" dirty="0" smtClean="0"/>
+              <a:t> </a:t>
+            </a:r>
+            <a:r>
+              <a:rPr lang="en-US" dirty="0" err="1" smtClean="0"/>
+              <a:t>Vai</a:t>
+            </a:r>
+            <a:r>
+              <a:rPr lang="en-US" dirty="0" smtClean="0"/>
+              <a:t> </a:t>
+            </a:r>
+            <a:r>
+              <a:rPr lang="en-US" dirty="0" err="1" smtClean="0"/>
+              <a:t>trò</a:t>
+            </a:r>
+            <a:endParaRPr lang="en-US" dirty="0" smtClean="0"/>
+          </a:p>
+        </p:txBody>
+      </p:sp>
+    </p:spTree>
+    <p:extLst>
+      <p:ext uri="{BB962C8B-B14F-4D97-AF65-F5344CB8AC3E}">
+        <p14:creationId xmlns:p14="http://schemas.microsoft.com/office/powerpoint/2010/main" val="3480539980"/>
+      </p:ext>
+    </p:extLst>
+  </p:cSld>
+  <p:clrMapOvr>
+    <a:masterClrMapping/>
+  </p:clrMapOvr>
+  <p:timing>
+    <p:tnLst>
+      <p:par>
+        <p:cTn id="1" dur="indefinite" restart="never" nodeType="tmRoot"/>
+      </p:par>
+    </p:tnLst>
+  </p:timing>
+</p:sld>
+</file>
+
+<file path=ppt/slides/slide12.xml><?xml version="1.0" encoding="utf-8"?>
+<p:sld xmlns:a="http://schemas.openxmlformats.org/drawingml/2006/main" xmlns:r="http://schemas.openxmlformats.org/officeDocument/2006/relationships" xmlns:p="http://schemas.openxmlformats.org/presentationml/2006/main">
+  <p:cSld>
+    <p:spTree>
+      <p:nvGrpSpPr>
+        <p:cNvPr id="1" name=""/>
+        <p:cNvGrpSpPr/>
+        <p:nvPr/>
+      </p:nvGrpSpPr>
+      <p:grpSpPr>
+        <a:xfrm>
+          <a:off x="0" y="0"/>
+          <a:ext cx="0" cy="0"/>
+          <a:chOff x="0" y="0"/>
+          <a:chExt cx="0" cy="0"/>
+        </a:xfrm>
+      </p:grpSpPr>
+      <p:sp>
+        <p:nvSpPr>
+          <p:cNvPr id="2" name="Title 1"/>
+          <p:cNvSpPr>
+            <a:spLocks noGrp="1"/>
+          </p:cNvSpPr>
+          <p:nvPr>
+            <p:ph type="title"/>
+          </p:nvPr>
+        </p:nvSpPr>
+        <p:spPr/>
+        <p:txBody>
+          <a:bodyPr/>
+          <a:lstStyle/>
+          <a:p>
+            <a:endParaRPr lang="en-US"/>
+          </a:p>
+        </p:txBody>
+      </p:sp>
+      <p:pic>
+        <p:nvPicPr>
+          <p:cNvPr id="5" name="Picture 4"/>
+          <p:cNvPicPr>
+            <a:picLocks noChangeAspect="1"/>
+          </p:cNvPicPr>
+          <p:nvPr/>
+        </p:nvPicPr>
+        <p:blipFill>
+          <a:blip r:embed="rId2">
+            <a:extLst>
+              <a:ext uri="{28A0092B-C50C-407E-A947-70E740481C1C}">
+                <a14:useLocalDpi xmlns:a14="http://schemas.microsoft.com/office/drawing/2010/main" val="0"/>
+              </a:ext>
+            </a:extLst>
+          </a:blip>
+          <a:stretch>
+            <a:fillRect/>
+          </a:stretch>
+        </p:blipFill>
+        <p:spPr>
+          <a:xfrm>
+            <a:off x="1894356" y="1072674"/>
+            <a:ext cx="8403287" cy="4719031"/>
+          </a:xfrm>
+          <a:prstGeom prst="rect">
+            <a:avLst/>
+          </a:prstGeom>
+        </p:spPr>
+      </p:pic>
+      <p:sp>
+        <p:nvSpPr>
+          <p:cNvPr id="6" name="Content Placeholder 5"/>
+          <p:cNvSpPr>
+            <a:spLocks noGrp="1"/>
+          </p:cNvSpPr>
+          <p:nvPr>
+            <p:ph idx="1"/>
+          </p:nvPr>
+        </p:nvSpPr>
+        <p:spPr/>
+        <p:txBody>
+          <a:bodyPr/>
+          <a:lstStyle/>
+          <a:p>
+            <a:endParaRPr lang="en-US" dirty="0"/>
+          </a:p>
+        </p:txBody>
+      </p:sp>
+    </p:spTree>
+    <p:extLst>
+      <p:ext uri="{BB962C8B-B14F-4D97-AF65-F5344CB8AC3E}">
+        <p14:creationId xmlns:p14="http://schemas.microsoft.com/office/powerpoint/2010/main" val="3688469236"/>
+      </p:ext>
+    </p:extLst>
+  </p:cSld>
+  <p:clrMapOvr>
+    <a:masterClrMapping/>
+  </p:clrMapOvr>
+  <p:timing>
+    <p:tnLst>
+      <p:par>
+        <p:cTn id="1" dur="indefinite" restart="never" nodeType="tmRoot"/>
+      </p:par>
+    </p:tnLst>
+  </p:timing>
+</p:sld>
+</file>
+
+<file path=ppt/slides/slide13.xml><?xml version="1.0" encoding="utf-8"?>
+<p:sld xmlns:a="http://schemas.openxmlformats.org/drawingml/2006/main" xmlns:r="http://schemas.openxmlformats.org/officeDocument/2006/relationships" xmlns:p="http://schemas.openxmlformats.org/presentationml/2006/main">
+  <p:cSld>
+    <p:spTree>
+      <p:nvGrpSpPr>
+        <p:cNvPr id="1" name=""/>
+        <p:cNvGrpSpPr/>
+        <p:nvPr/>
+      </p:nvGrpSpPr>
+      <p:grpSpPr>
+        <a:xfrm>
+          <a:off x="0" y="0"/>
+          <a:ext cx="0" cy="0"/>
+          <a:chOff x="0" y="0"/>
+          <a:chExt cx="0" cy="0"/>
+        </a:xfrm>
+      </p:grpSpPr>
+      <p:sp>
+        <p:nvSpPr>
+          <p:cNvPr id="2" name="Title 1"/>
+          <p:cNvSpPr>
+            <a:spLocks noGrp="1"/>
+          </p:cNvSpPr>
+          <p:nvPr>
+            <p:ph type="title"/>
+          </p:nvPr>
+        </p:nvSpPr>
+        <p:spPr/>
+        <p:txBody>
+          <a:bodyPr/>
+          <a:lstStyle/>
+          <a:p>
+            <a:endParaRPr lang="en-US" dirty="0"/>
+          </a:p>
+        </p:txBody>
+      </p:sp>
+      <p:pic>
+        <p:nvPicPr>
+          <p:cNvPr id="5" name="Content Placeholder 4"/>
+          <p:cNvPicPr>
+            <a:picLocks noGrp="1" noChangeAspect="1"/>
+          </p:cNvPicPr>
+          <p:nvPr>
+            <p:ph idx="1"/>
+          </p:nvPr>
+        </p:nvPicPr>
+        <p:blipFill>
+          <a:blip r:embed="rId2">
+            <a:extLst>
+              <a:ext uri="{28A0092B-C50C-407E-A947-70E740481C1C}">
+                <a14:useLocalDpi xmlns:a14="http://schemas.microsoft.com/office/drawing/2010/main" val="0"/>
+              </a:ext>
+            </a:extLst>
+          </a:blip>
+          <a:stretch>
+            <a:fillRect/>
+          </a:stretch>
+        </p:blipFill>
+        <p:spPr>
+          <a:xfrm>
+            <a:off x="1332179" y="695397"/>
+            <a:ext cx="9527642" cy="5359299"/>
+          </a:xfrm>
+        </p:spPr>
+      </p:pic>
+      <p:pic>
+        <p:nvPicPr>
+          <p:cNvPr id="4" name="Content Placeholder 3"/>
+          <p:cNvPicPr>
+            <a:picLocks noGrp="1" noChangeAspect="1"/>
+          </p:cNvPicPr>
+          <p:nvPr>
+            <p:ph idx="1"/>
+          </p:nvPr>
+        </p:nvPicPr>
+        <p:blipFill>
+          <a:blip r:embed="rId2">
+            <a:extLst>
+              <a:ext uri="{28A0092B-C50C-407E-A947-70E740481C1C}">
+                <a14:useLocalDpi xmlns:a14="http://schemas.microsoft.com/office/drawing/2010/main" val="0"/>
+              </a:ext>
+            </a:extLst>
+          </a:blip>
+          <a:stretch>
+            <a:fillRect/>
+          </a:stretch>
+        </p:blipFill>
+        <p:spPr>
+          <a:xfrm>
+            <a:off x="1379207" y="695397"/>
+            <a:ext cx="9433586" cy="5306392"/>
+          </a:xfrm>
+        </p:spPr>
+      </p:pic>
+    </p:spTree>
+    <p:extLst>
+      <p:ext uri="{BB962C8B-B14F-4D97-AF65-F5344CB8AC3E}">
+        <p14:creationId xmlns:p14="http://schemas.microsoft.com/office/powerpoint/2010/main" val="2648176131"/>
+      </p:ext>
+    </p:extLst>
+  </p:cSld>
+  <p:clrMapOvr>
+    <a:masterClrMapping/>
+  </p:clrMapOvr>
+  <p:timing>
+    <p:tnLst>
+      <p:par>
+        <p:cTn id="1" dur="indefinite" restart="never" nodeType="tmRoot"/>
+      </p:par>
+    </p:tnLst>
+  </p:timing>
+</p:sld>
+</file>
+
+<file path=ppt/slides/slide14.xml><?xml version="1.0" encoding="utf-8"?>
+<p:sld xmlns:a="http://schemas.openxmlformats.org/drawingml/2006/main" xmlns:r="http://schemas.openxmlformats.org/officeDocument/2006/relationships" xmlns:p="http://schemas.openxmlformats.org/presentationml/2006/main">
+  <p:cSld>
+    <p:spTree>
+      <p:nvGrpSpPr>
+        <p:cNvPr id="1" name=""/>
+        <p:cNvGrpSpPr/>
+        <p:nvPr/>
+      </p:nvGrpSpPr>
+      <p:grpSpPr>
+        <a:xfrm>
+          <a:off x="0" y="0"/>
+          <a:ext cx="0" cy="0"/>
+          <a:chOff x="0" y="0"/>
+          <a:chExt cx="0" cy="0"/>
+        </a:xfrm>
+      </p:grpSpPr>
+      <p:sp>
+        <p:nvSpPr>
+          <p:cNvPr id="2" name="Title 1"/>
+          <p:cNvSpPr>
+            <a:spLocks noGrp="1"/>
+          </p:cNvSpPr>
+          <p:nvPr>
+            <p:ph type="title"/>
+          </p:nvPr>
+        </p:nvSpPr>
+        <p:spPr/>
+        <p:txBody>
+          <a:bodyPr/>
+          <a:lstStyle/>
+          <a:p>
+            <a:r>
+              <a:rPr lang="en-US" b="1" dirty="0"/>
+              <a:t>1. </a:t>
+            </a:r>
+            <a:r>
+              <a:rPr lang="en-US" b="1" dirty="0" err="1"/>
+              <a:t>Giới</a:t>
+            </a:r>
+            <a:r>
+              <a:rPr lang="en-US" b="1" dirty="0"/>
+              <a:t> </a:t>
+            </a:r>
+            <a:r>
+              <a:rPr lang="en-US" b="1" dirty="0" err="1"/>
+              <a:t>thiệu</a:t>
+            </a:r>
+            <a:r>
+              <a:rPr lang="en-US" b="1" dirty="0"/>
+              <a:t> </a:t>
+            </a:r>
+            <a:r>
+              <a:rPr lang="en-US" b="1" dirty="0" err="1"/>
+              <a:t>về</a:t>
+            </a:r>
+            <a:r>
+              <a:rPr lang="en-US" b="1" dirty="0"/>
+              <a:t> AI</a:t>
+            </a:r>
+            <a:endParaRPr lang="en-US" b="1" dirty="0"/>
+          </a:p>
+        </p:txBody>
+      </p:sp>
+      <p:sp>
+        <p:nvSpPr>
+          <p:cNvPr id="3" name="Content Placeholder 2"/>
+          <p:cNvSpPr>
+            <a:spLocks noGrp="1"/>
+          </p:cNvSpPr>
+          <p:nvPr>
+            <p:ph idx="1"/>
+          </p:nvPr>
+        </p:nvSpPr>
+        <p:spPr/>
+        <p:txBody>
+          <a:bodyPr/>
+          <a:lstStyle/>
+          <a:p>
+            <a:r>
+              <a:rPr lang="en-US" dirty="0" err="1" smtClean="0"/>
+              <a:t>Khái</a:t>
+            </a:r>
+            <a:r>
+              <a:rPr lang="en-US" dirty="0" smtClean="0"/>
+              <a:t> </a:t>
+            </a:r>
+            <a:r>
+              <a:rPr lang="en-US" dirty="0" err="1" smtClean="0"/>
+              <a:t>niệm</a:t>
+            </a:r>
+            <a:endParaRPr lang="en-US" dirty="0" smtClean="0"/>
+          </a:p>
+          <a:p>
+            <a:r>
+              <a:rPr lang="en-US" dirty="0" err="1" smtClean="0"/>
+              <a:t>Lĩnh</a:t>
+            </a:r>
+            <a:r>
+              <a:rPr lang="en-US" dirty="0" smtClean="0"/>
+              <a:t> </a:t>
+            </a:r>
+            <a:r>
+              <a:rPr lang="en-US" dirty="0" err="1" smtClean="0"/>
+              <a:t>vực</a:t>
+            </a:r>
+            <a:r>
+              <a:rPr lang="en-US" dirty="0" smtClean="0"/>
+              <a:t> </a:t>
+            </a:r>
+            <a:r>
+              <a:rPr lang="en-US" dirty="0" err="1" smtClean="0"/>
+              <a:t>chính</a:t>
+            </a:r>
+            <a:r>
+              <a:rPr lang="en-US" dirty="0" smtClean="0"/>
+              <a:t>: ML, DL, NLP, Computer Vision, Robotics</a:t>
+            </a:r>
+          </a:p>
+          <a:p>
+            <a:r>
+              <a:rPr lang="en-US" dirty="0" err="1" smtClean="0"/>
+              <a:t>Ứng</a:t>
+            </a:r>
+            <a:r>
+              <a:rPr lang="en-US" dirty="0" smtClean="0"/>
+              <a:t> </a:t>
+            </a:r>
+            <a:r>
+              <a:rPr lang="en-US" dirty="0" err="1" smtClean="0"/>
+              <a:t>dụng</a:t>
+            </a:r>
+            <a:r>
+              <a:rPr lang="en-US" dirty="0" smtClean="0"/>
+              <a:t> </a:t>
+            </a:r>
+            <a:r>
+              <a:rPr lang="en-US" dirty="0" err="1" smtClean="0"/>
+              <a:t>của</a:t>
+            </a:r>
+            <a:r>
+              <a:rPr lang="en-US" dirty="0" smtClean="0"/>
+              <a:t> AI</a:t>
+            </a:r>
+            <a:endParaRPr lang="en-US" dirty="0"/>
+          </a:p>
+          <a:p>
+            <a:r>
+              <a:rPr lang="en-US" dirty="0" err="1" smtClean="0"/>
+              <a:t>Dữ</a:t>
+            </a:r>
+            <a:r>
+              <a:rPr lang="en-US" dirty="0" smtClean="0"/>
+              <a:t> </a:t>
+            </a:r>
+            <a:r>
+              <a:rPr lang="en-US" dirty="0" err="1" smtClean="0"/>
+              <a:t>liệu</a:t>
+            </a:r>
+            <a:r>
+              <a:rPr lang="en-US" dirty="0" smtClean="0"/>
+              <a:t>: </a:t>
+            </a:r>
+            <a:r>
+              <a:rPr lang="en-US" dirty="0" err="1" smtClean="0"/>
+              <a:t>Khái</a:t>
+            </a:r>
+            <a:r>
+              <a:rPr lang="en-US" dirty="0" smtClean="0"/>
+              <a:t> </a:t>
+            </a:r>
+            <a:r>
+              <a:rPr lang="en-US" dirty="0" err="1" smtClean="0"/>
+              <a:t>niệm</a:t>
+            </a:r>
+            <a:r>
+              <a:rPr lang="en-US" dirty="0" smtClean="0"/>
+              <a:t> </a:t>
+            </a:r>
+            <a:r>
+              <a:rPr lang="en-US" dirty="0" err="1" smtClean="0"/>
+              <a:t>và</a:t>
+            </a:r>
+            <a:r>
+              <a:rPr lang="en-US" dirty="0" smtClean="0"/>
+              <a:t> </a:t>
+            </a:r>
+            <a:r>
+              <a:rPr lang="en-US" dirty="0" err="1" smtClean="0"/>
+              <a:t>Vai</a:t>
+            </a:r>
+            <a:r>
+              <a:rPr lang="en-US" dirty="0" smtClean="0"/>
+              <a:t> </a:t>
+            </a:r>
+            <a:r>
+              <a:rPr lang="en-US" dirty="0" err="1" smtClean="0"/>
+              <a:t>trò</a:t>
+            </a:r>
+            <a:endParaRPr lang="en-US" dirty="0" smtClean="0"/>
+          </a:p>
+          <a:p>
+            <a:r>
+              <a:rPr lang="en-US" dirty="0" smtClean="0"/>
+              <a:t>Ba </a:t>
+            </a:r>
+            <a:r>
+              <a:rPr lang="en-US" dirty="0" err="1" smtClean="0"/>
+              <a:t>bài</a:t>
+            </a:r>
+            <a:r>
+              <a:rPr lang="en-US" dirty="0" smtClean="0"/>
+              <a:t> </a:t>
+            </a:r>
+            <a:r>
+              <a:rPr lang="en-US" dirty="0" err="1" smtClean="0"/>
+              <a:t>toán</a:t>
+            </a:r>
+            <a:r>
+              <a:rPr lang="en-US" dirty="0" smtClean="0"/>
+              <a:t> </a:t>
+            </a:r>
+            <a:r>
+              <a:rPr lang="en-US" dirty="0" err="1" smtClean="0"/>
+              <a:t>chính</a:t>
+            </a:r>
+            <a:r>
+              <a:rPr lang="en-US" dirty="0" smtClean="0"/>
+              <a:t> </a:t>
+            </a:r>
+            <a:r>
+              <a:rPr lang="en-US" dirty="0" err="1" smtClean="0"/>
+              <a:t>trong</a:t>
+            </a:r>
+            <a:r>
+              <a:rPr lang="en-US" dirty="0" smtClean="0"/>
+              <a:t> ML</a:t>
+            </a:r>
+          </a:p>
+        </p:txBody>
+      </p:sp>
+    </p:spTree>
+    <p:extLst>
+      <p:ext uri="{BB962C8B-B14F-4D97-AF65-F5344CB8AC3E}">
+        <p14:creationId xmlns:p14="http://schemas.microsoft.com/office/powerpoint/2010/main" val="2901119852"/>
+      </p:ext>
+    </p:extLst>
+  </p:cSld>
+  <p:clrMapOvr>
+    <a:masterClrMapping/>
+  </p:clrMapOvr>
+  <p:timing>
+    <p:tnLst>
+      <p:par>
+        <p:cTn id="1" dur="indefinite" restart="never" nodeType="tmRoot"/>
+      </p:par>
+    </p:tnLst>
+  </p:timing>
+</p:sld>
+</file>
+
+<file path=ppt/slides/slide15.xml><?xml version="1.0" encoding="utf-8"?>
+<p:sld xmlns:a="http://schemas.openxmlformats.org/drawingml/2006/main" xmlns:r="http://schemas.openxmlformats.org/officeDocument/2006/relationships" xmlns:p="http://schemas.openxmlformats.org/presentationml/2006/main">
+  <p:cSld>
+    <p:spTree>
+      <p:nvGrpSpPr>
+        <p:cNvPr id="1" name=""/>
+        <p:cNvGrpSpPr/>
+        <p:nvPr/>
+      </p:nvGrpSpPr>
+      <p:grpSpPr>
+        <a:xfrm>
+          <a:off x="0" y="0"/>
+          <a:ext cx="0" cy="0"/>
+          <a:chOff x="0" y="0"/>
+          <a:chExt cx="0" cy="0"/>
+        </a:xfrm>
+      </p:grpSpPr>
+      <p:sp>
+        <p:nvSpPr>
+          <p:cNvPr id="2" name="Title 1"/>
+          <p:cNvSpPr>
+            <a:spLocks noGrp="1"/>
+          </p:cNvSpPr>
+          <p:nvPr>
+            <p:ph type="title"/>
+          </p:nvPr>
+        </p:nvSpPr>
+        <p:spPr/>
+        <p:txBody>
+          <a:bodyPr/>
+          <a:lstStyle/>
+          <a:p>
+            <a:endParaRPr lang="en-US"/>
+          </a:p>
+        </p:txBody>
+      </p:sp>
+      <p:pic>
+        <p:nvPicPr>
+          <p:cNvPr id="4" name="Content Placeholder 3"/>
+          <p:cNvPicPr>
+            <a:picLocks noGrp="1" noChangeAspect="1"/>
+          </p:cNvPicPr>
+          <p:nvPr>
+            <p:ph idx="1"/>
+          </p:nvPr>
+        </p:nvPicPr>
+        <p:blipFill>
+          <a:blip r:embed="rId2">
+            <a:extLst>
+              <a:ext uri="{28A0092B-C50C-407E-A947-70E740481C1C}">
+                <a14:useLocalDpi xmlns:a14="http://schemas.microsoft.com/office/drawing/2010/main" val="0"/>
+              </a:ext>
+            </a:extLst>
+          </a:blip>
+          <a:stretch>
+            <a:fillRect/>
+          </a:stretch>
+        </p:blipFill>
+        <p:spPr>
+          <a:xfrm>
+            <a:off x="1011711" y="838647"/>
+            <a:ext cx="10168577" cy="5412523"/>
+          </a:xfrm>
+        </p:spPr>
+      </p:pic>
+    </p:spTree>
+    <p:extLst>
+      <p:ext uri="{BB962C8B-B14F-4D97-AF65-F5344CB8AC3E}">
+        <p14:creationId xmlns:p14="http://schemas.microsoft.com/office/powerpoint/2010/main" val="2274608170"/>
+      </p:ext>
+    </p:extLst>
+  </p:cSld>
+  <p:clrMapOvr>
+    <a:masterClrMapping/>
+  </p:clrMapOvr>
+  <p:timing>
+    <p:tnLst>
+      <p:par>
+        <p:cTn id="1" dur="indefinite" restart="never" nodeType="tmRoot"/>
+      </p:par>
+    </p:tnLst>
+  </p:timing>
+</p:sld>
+</file>
+
+<file path=ppt/slides/slide16.xml><?xml version="1.0" encoding="utf-8"?>
+<p:sld xmlns:a="http://schemas.openxmlformats.org/drawingml/2006/main" xmlns:r="http://schemas.openxmlformats.org/officeDocument/2006/relationships" xmlns:p="http://schemas.openxmlformats.org/presentationml/2006/main">
+  <p:cSld>
+    <p:spTree>
+      <p:nvGrpSpPr>
+        <p:cNvPr id="1" name=""/>
+        <p:cNvGrpSpPr/>
+        <p:nvPr/>
+      </p:nvGrpSpPr>
+      <p:grpSpPr>
+        <a:xfrm>
+          <a:off x="0" y="0"/>
+          <a:ext cx="0" cy="0"/>
+          <a:chOff x="0" y="0"/>
+          <a:chExt cx="0" cy="0"/>
+        </a:xfrm>
+      </p:grpSpPr>
+      <p:sp>
+        <p:nvSpPr>
+          <p:cNvPr id="2" name="Title 1"/>
+          <p:cNvSpPr>
+            <a:spLocks noGrp="1"/>
+          </p:cNvSpPr>
+          <p:nvPr>
+            <p:ph type="title"/>
+          </p:nvPr>
+        </p:nvSpPr>
+        <p:spPr/>
+        <p:txBody>
+          <a:bodyPr/>
+          <a:lstStyle/>
+          <a:p>
+            <a:r>
+              <a:rPr lang="en-US" b="1" dirty="0"/>
+              <a:t>1. </a:t>
+            </a:r>
+            <a:r>
+              <a:rPr lang="en-US" b="1" dirty="0" err="1"/>
+              <a:t>Giới</a:t>
+            </a:r>
+            <a:r>
+              <a:rPr lang="en-US" b="1" dirty="0"/>
+              <a:t> </a:t>
+            </a:r>
+            <a:r>
+              <a:rPr lang="en-US" b="1" dirty="0" err="1"/>
+              <a:t>thiệu</a:t>
+            </a:r>
+            <a:r>
+              <a:rPr lang="en-US" b="1" dirty="0"/>
+              <a:t> </a:t>
+            </a:r>
+            <a:r>
+              <a:rPr lang="en-US" b="1" dirty="0" err="1"/>
+              <a:t>về</a:t>
+            </a:r>
+            <a:r>
+              <a:rPr lang="en-US" b="1" dirty="0"/>
+              <a:t> AI</a:t>
+            </a:r>
+            <a:endParaRPr lang="en-US" b="1" dirty="0"/>
+          </a:p>
+        </p:txBody>
+      </p:sp>
+      <p:sp>
+        <p:nvSpPr>
+          <p:cNvPr id="3" name="Content Placeholder 2"/>
+          <p:cNvSpPr>
+            <a:spLocks noGrp="1"/>
+          </p:cNvSpPr>
+          <p:nvPr>
+            <p:ph idx="1"/>
+          </p:nvPr>
+        </p:nvSpPr>
+        <p:spPr/>
+        <p:txBody>
+          <a:bodyPr/>
+          <a:lstStyle/>
+          <a:p>
+            <a:r>
+              <a:rPr lang="en-US" dirty="0" err="1" smtClean="0"/>
+              <a:t>Khái</a:t>
+            </a:r>
+            <a:r>
+              <a:rPr lang="en-US" dirty="0" smtClean="0"/>
+              <a:t> </a:t>
+            </a:r>
+            <a:r>
+              <a:rPr lang="en-US" dirty="0" err="1" smtClean="0"/>
+              <a:t>niệm</a:t>
+            </a:r>
+            <a:endParaRPr lang="en-US" dirty="0" smtClean="0"/>
+          </a:p>
+          <a:p>
+            <a:r>
+              <a:rPr lang="en-US" dirty="0" err="1" smtClean="0"/>
+              <a:t>Lĩnh</a:t>
+            </a:r>
+            <a:r>
+              <a:rPr lang="en-US" dirty="0" smtClean="0"/>
+              <a:t> </a:t>
+            </a:r>
+            <a:r>
+              <a:rPr lang="en-US" dirty="0" err="1" smtClean="0"/>
+              <a:t>vực</a:t>
+            </a:r>
+            <a:r>
+              <a:rPr lang="en-US" dirty="0" smtClean="0"/>
+              <a:t> </a:t>
+            </a:r>
+            <a:r>
+              <a:rPr lang="en-US" dirty="0" err="1" smtClean="0"/>
+              <a:t>chính</a:t>
+            </a:r>
+            <a:r>
+              <a:rPr lang="en-US" dirty="0" smtClean="0"/>
+              <a:t>: ML, DL, NLP, Computer Vision, Robotics</a:t>
+            </a:r>
+          </a:p>
+          <a:p>
+            <a:r>
+              <a:rPr lang="en-US" dirty="0" err="1" smtClean="0"/>
+              <a:t>Ứng</a:t>
+            </a:r>
+            <a:r>
+              <a:rPr lang="en-US" dirty="0" smtClean="0"/>
+              <a:t> </a:t>
+            </a:r>
+            <a:r>
+              <a:rPr lang="en-US" dirty="0" err="1" smtClean="0"/>
+              <a:t>dụng</a:t>
+            </a:r>
+            <a:r>
+              <a:rPr lang="en-US" dirty="0" smtClean="0"/>
+              <a:t> </a:t>
+            </a:r>
+            <a:r>
+              <a:rPr lang="en-US" dirty="0" err="1" smtClean="0"/>
+              <a:t>của</a:t>
+            </a:r>
+            <a:r>
+              <a:rPr lang="en-US" dirty="0" smtClean="0"/>
+              <a:t> AI</a:t>
+            </a:r>
+            <a:endParaRPr lang="en-US" dirty="0"/>
+          </a:p>
+          <a:p>
+            <a:r>
+              <a:rPr lang="en-US" dirty="0" err="1" smtClean="0"/>
+              <a:t>Dữ</a:t>
+            </a:r>
+            <a:r>
+              <a:rPr lang="en-US" dirty="0" smtClean="0"/>
+              <a:t> </a:t>
+            </a:r>
+            <a:r>
+              <a:rPr lang="en-US" dirty="0" err="1" smtClean="0"/>
+              <a:t>liệu</a:t>
+            </a:r>
+            <a:r>
+              <a:rPr lang="en-US" dirty="0" smtClean="0"/>
+              <a:t>: </a:t>
+            </a:r>
+            <a:r>
+              <a:rPr lang="en-US" dirty="0" err="1" smtClean="0"/>
+              <a:t>Khái</a:t>
+            </a:r>
+            <a:r>
+              <a:rPr lang="en-US" dirty="0" smtClean="0"/>
+              <a:t> </a:t>
+            </a:r>
+            <a:r>
+              <a:rPr lang="en-US" dirty="0" err="1" smtClean="0"/>
+              <a:t>niệm</a:t>
+            </a:r>
+            <a:r>
+              <a:rPr lang="en-US" dirty="0" smtClean="0"/>
+              <a:t> </a:t>
+            </a:r>
+            <a:r>
+              <a:rPr lang="en-US" dirty="0" err="1" smtClean="0"/>
+              <a:t>và</a:t>
+            </a:r>
+            <a:r>
+              <a:rPr lang="en-US" dirty="0" smtClean="0"/>
+              <a:t> </a:t>
+            </a:r>
+            <a:r>
+              <a:rPr lang="en-US" dirty="0" err="1" smtClean="0"/>
+              <a:t>Vai</a:t>
+            </a:r>
+            <a:r>
+              <a:rPr lang="en-US" dirty="0" smtClean="0"/>
+              <a:t> </a:t>
+            </a:r>
+            <a:r>
+              <a:rPr lang="en-US" dirty="0" err="1" smtClean="0"/>
+              <a:t>trò</a:t>
+            </a:r>
+            <a:endParaRPr lang="en-US" dirty="0" smtClean="0"/>
+          </a:p>
+          <a:p>
+            <a:r>
+              <a:rPr lang="en-US" dirty="0" smtClean="0"/>
+              <a:t>Ba </a:t>
+            </a:r>
+            <a:r>
+              <a:rPr lang="en-US" dirty="0" err="1" smtClean="0"/>
+              <a:t>bài</a:t>
+            </a:r>
+            <a:r>
+              <a:rPr lang="en-US" dirty="0" smtClean="0"/>
+              <a:t> </a:t>
+            </a:r>
+            <a:r>
+              <a:rPr lang="en-US" dirty="0" err="1" smtClean="0"/>
+              <a:t>toán</a:t>
+            </a:r>
+            <a:r>
+              <a:rPr lang="en-US" dirty="0" smtClean="0"/>
+              <a:t> </a:t>
+            </a:r>
+            <a:r>
+              <a:rPr lang="en-US" dirty="0" err="1" smtClean="0"/>
+              <a:t>chính</a:t>
+            </a:r>
+            <a:r>
+              <a:rPr lang="en-US" dirty="0" smtClean="0"/>
+              <a:t> </a:t>
+            </a:r>
+            <a:r>
+              <a:rPr lang="en-US" dirty="0" err="1" smtClean="0"/>
+              <a:t>trong</a:t>
+            </a:r>
+            <a:r>
+              <a:rPr lang="en-US" dirty="0" smtClean="0"/>
+              <a:t> ML</a:t>
+            </a:r>
+          </a:p>
+          <a:p>
+            <a:r>
+              <a:rPr lang="en-US" dirty="0" err="1" smtClean="0"/>
+              <a:t>Thuật</a:t>
+            </a:r>
+            <a:r>
+              <a:rPr lang="en-US" dirty="0" smtClean="0"/>
+              <a:t> </a:t>
+            </a:r>
+            <a:r>
+              <a:rPr lang="en-US" dirty="0" err="1" smtClean="0"/>
+              <a:t>ngữ</a:t>
+            </a:r>
+            <a:r>
+              <a:rPr lang="en-US" dirty="0" smtClean="0"/>
+              <a:t> </a:t>
+            </a:r>
+            <a:r>
+              <a:rPr lang="en-US" dirty="0" err="1" smtClean="0"/>
+              <a:t>và</a:t>
+            </a:r>
+            <a:r>
+              <a:rPr lang="en-US" dirty="0" smtClean="0"/>
+              <a:t> </a:t>
+            </a:r>
+            <a:r>
+              <a:rPr lang="en-US" dirty="0" err="1" smtClean="0"/>
+              <a:t>Ký</a:t>
+            </a:r>
+            <a:r>
+              <a:rPr lang="en-US" dirty="0" smtClean="0"/>
+              <a:t> </a:t>
+            </a:r>
+            <a:r>
+              <a:rPr lang="en-US" dirty="0" err="1" smtClean="0"/>
+              <a:t>hiệu</a:t>
+            </a:r>
+            <a:r>
+              <a:rPr lang="en-US" dirty="0" smtClean="0"/>
+              <a:t> </a:t>
+            </a:r>
+            <a:r>
+              <a:rPr lang="en-US" dirty="0" err="1" smtClean="0"/>
+              <a:t>nổi</a:t>
+            </a:r>
+            <a:r>
+              <a:rPr lang="en-US" dirty="0" smtClean="0"/>
+              <a:t> </a:t>
+            </a:r>
+            <a:r>
+              <a:rPr lang="en-US" dirty="0" err="1" smtClean="0"/>
+              <a:t>bật</a:t>
+            </a:r>
+            <a:endParaRPr lang="en-US" dirty="0" smtClean="0"/>
+          </a:p>
+        </p:txBody>
+      </p:sp>
+    </p:spTree>
+    <p:extLst>
+      <p:ext uri="{BB962C8B-B14F-4D97-AF65-F5344CB8AC3E}">
+        <p14:creationId xmlns:p14="http://schemas.microsoft.com/office/powerpoint/2010/main" val="701124292"/>
+      </p:ext>
+    </p:extLst>
+  </p:cSld>
+  <p:clrMapOvr>
+    <a:masterClrMapping/>
+  </p:clrMapOvr>
+  <p:timing>
+    <p:tnLst>
+      <p:par>
+        <p:cTn id="1" dur="indefinite" restart="never" nodeType="tmRoot"/>
+      </p:par>
+    </p:tnLst>
+  </p:timing>
+</p:sld>
+</file>
+
+<file path=ppt/slides/slide17.xml><?xml version="1.0" encoding="utf-8"?>
+<p:sld xmlns:a="http://schemas.openxmlformats.org/drawingml/2006/main" xmlns:r="http://schemas.openxmlformats.org/officeDocument/2006/relationships" xmlns:p="http://schemas.openxmlformats.org/presentationml/2006/main">
+  <p:cSld>
+    <p:spTree>
+      <p:nvGrpSpPr>
+        <p:cNvPr id="1" name=""/>
+        <p:cNvGrpSpPr/>
+        <p:nvPr/>
+      </p:nvGrpSpPr>
+      <p:grpSpPr>
+        <a:xfrm>
+          <a:off x="0" y="0"/>
+          <a:ext cx="0" cy="0"/>
+          <a:chOff x="0" y="0"/>
+          <a:chExt cx="0" cy="0"/>
+        </a:xfrm>
+      </p:grpSpPr>
+      <p:sp>
+        <p:nvSpPr>
+          <p:cNvPr id="2" name="Title 1"/>
+          <p:cNvSpPr>
+            <a:spLocks noGrp="1"/>
+          </p:cNvSpPr>
+          <p:nvPr>
+            <p:ph type="title"/>
+          </p:nvPr>
+        </p:nvSpPr>
+        <p:spPr/>
+        <p:txBody>
+          <a:bodyPr/>
+          <a:lstStyle/>
+          <a:p>
+            <a:endParaRPr lang="en-US" dirty="0"/>
+          </a:p>
+        </p:txBody>
+      </p:sp>
+      <p:pic>
+        <p:nvPicPr>
+          <p:cNvPr id="5" name="Content Placeholder 4"/>
+          <p:cNvPicPr>
+            <a:picLocks noGrp="1" noChangeAspect="1"/>
+          </p:cNvPicPr>
+          <p:nvPr>
+            <p:ph idx="1"/>
+          </p:nvPr>
+        </p:nvPicPr>
+        <p:blipFill>
+          <a:blip r:embed="rId2"/>
+          <a:stretch>
+            <a:fillRect/>
+          </a:stretch>
+        </p:blipFill>
+        <p:spPr>
+          <a:xfrm>
+            <a:off x="6038217" y="698269"/>
+            <a:ext cx="5690459" cy="3075709"/>
+          </a:xfrm>
+          <a:prstGeom prst="rect">
+            <a:avLst/>
+          </a:prstGeom>
+        </p:spPr>
+      </p:pic>
+      <p:pic>
+        <p:nvPicPr>
+          <p:cNvPr id="4" name="Picture 3"/>
+          <p:cNvPicPr>
+            <a:picLocks noChangeAspect="1"/>
+          </p:cNvPicPr>
+          <p:nvPr/>
+        </p:nvPicPr>
+        <p:blipFill>
+          <a:blip r:embed="rId3"/>
+          <a:stretch>
+            <a:fillRect/>
+          </a:stretch>
+        </p:blipFill>
+        <p:spPr>
+          <a:xfrm>
+            <a:off x="560887" y="698269"/>
+            <a:ext cx="5410829" cy="6068290"/>
+          </a:xfrm>
+          <a:prstGeom prst="rect">
+            <a:avLst/>
+          </a:prstGeom>
+        </p:spPr>
+      </p:pic>
+      <p:sp>
+        <p:nvSpPr>
+          <p:cNvPr id="6" name="TextBox 5"/>
+          <p:cNvSpPr txBox="1"/>
+          <p:nvPr/>
+        </p:nvSpPr>
+        <p:spPr>
+          <a:xfrm>
+            <a:off x="2261062" y="347031"/>
+            <a:ext cx="1633268" cy="369332"/>
+          </a:xfrm>
+          <a:prstGeom prst="rect">
+            <a:avLst/>
+          </a:prstGeom>
+          <a:noFill/>
+        </p:spPr>
+        <p:txBody>
+          <a:bodyPr wrap="none" rtlCol="0">
+            <a:spAutoFit/>
+          </a:bodyPr>
+          <a:lstStyle/>
+          <a:p>
+            <a:r>
+              <a:rPr lang="en-US" dirty="0" err="1" smtClean="0">
+                <a:solidFill>
+                  <a:schemeClr val="tx1">
+                    <a:lumMod val="65000"/>
+                    <a:lumOff val="35000"/>
+                  </a:schemeClr>
+                </a:solidFill>
+              </a:rPr>
+              <a:t>Bảng</a:t>
+            </a:r>
+            <a:r>
+              <a:rPr lang="en-US" dirty="0" smtClean="0">
+                <a:solidFill>
+                  <a:schemeClr val="tx1">
+                    <a:lumMod val="65000"/>
+                    <a:lumOff val="35000"/>
+                  </a:schemeClr>
+                </a:solidFill>
+              </a:rPr>
+              <a:t> </a:t>
+            </a:r>
+            <a:r>
+              <a:rPr lang="en-US" dirty="0" err="1" smtClean="0">
+                <a:solidFill>
+                  <a:schemeClr val="tx1">
+                    <a:lumMod val="65000"/>
+                    <a:lumOff val="35000"/>
+                  </a:schemeClr>
+                </a:solidFill>
+              </a:rPr>
+              <a:t>thuật</a:t>
+            </a:r>
+            <a:r>
+              <a:rPr lang="en-US" dirty="0" smtClean="0">
+                <a:solidFill>
+                  <a:schemeClr val="tx1">
+                    <a:lumMod val="65000"/>
+                    <a:lumOff val="35000"/>
+                  </a:schemeClr>
+                </a:solidFill>
+              </a:rPr>
+              <a:t> </a:t>
+            </a:r>
+            <a:r>
+              <a:rPr lang="en-US" dirty="0" err="1" smtClean="0">
+                <a:solidFill>
+                  <a:schemeClr val="tx1">
+                    <a:lumMod val="65000"/>
+                    <a:lumOff val="35000"/>
+                  </a:schemeClr>
+                </a:solidFill>
+              </a:rPr>
+              <a:t>ngữ</a:t>
+            </a:r>
+            <a:endParaRPr lang="en-US" dirty="0">
+              <a:solidFill>
+                <a:schemeClr val="tx1">
+                  <a:lumMod val="65000"/>
+                  <a:lumOff val="35000"/>
+                </a:schemeClr>
+              </a:solidFill>
+            </a:endParaRPr>
+          </a:p>
+        </p:txBody>
+      </p:sp>
+      <p:sp>
+        <p:nvSpPr>
+          <p:cNvPr id="7" name="TextBox 6"/>
+          <p:cNvSpPr txBox="1"/>
+          <p:nvPr/>
+        </p:nvSpPr>
+        <p:spPr>
+          <a:xfrm>
+            <a:off x="8199120" y="347031"/>
+            <a:ext cx="1377300" cy="369332"/>
+          </a:xfrm>
+          <a:prstGeom prst="rect">
+            <a:avLst/>
+          </a:prstGeom>
+          <a:noFill/>
+        </p:spPr>
+        <p:txBody>
+          <a:bodyPr wrap="none" rtlCol="0">
+            <a:spAutoFit/>
+          </a:bodyPr>
+          <a:lstStyle/>
+          <a:p>
+            <a:r>
+              <a:rPr lang="en-US" dirty="0" err="1" smtClean="0">
+                <a:solidFill>
+                  <a:schemeClr val="tx1">
+                    <a:lumMod val="65000"/>
+                    <a:lumOff val="35000"/>
+                  </a:schemeClr>
+                </a:solidFill>
+              </a:rPr>
+              <a:t>Bảng</a:t>
+            </a:r>
+            <a:r>
+              <a:rPr lang="en-US" dirty="0" smtClean="0">
+                <a:solidFill>
+                  <a:schemeClr val="tx1">
+                    <a:lumMod val="65000"/>
+                    <a:lumOff val="35000"/>
+                  </a:schemeClr>
+                </a:solidFill>
+              </a:rPr>
+              <a:t> </a:t>
+            </a:r>
+            <a:r>
+              <a:rPr lang="en-US" dirty="0" err="1" smtClean="0">
+                <a:solidFill>
+                  <a:schemeClr val="tx1">
+                    <a:lumMod val="65000"/>
+                    <a:lumOff val="35000"/>
+                  </a:schemeClr>
+                </a:solidFill>
+              </a:rPr>
+              <a:t>ký</a:t>
+            </a:r>
+            <a:r>
+              <a:rPr lang="en-US" dirty="0" smtClean="0">
+                <a:solidFill>
+                  <a:schemeClr val="tx1">
+                    <a:lumMod val="65000"/>
+                    <a:lumOff val="35000"/>
+                  </a:schemeClr>
+                </a:solidFill>
+              </a:rPr>
+              <a:t> </a:t>
+            </a:r>
+            <a:r>
+              <a:rPr lang="en-US" dirty="0" err="1" smtClean="0">
+                <a:solidFill>
+                  <a:schemeClr val="tx1">
+                    <a:lumMod val="65000"/>
+                    <a:lumOff val="35000"/>
+                  </a:schemeClr>
+                </a:solidFill>
+              </a:rPr>
+              <a:t>hiệu</a:t>
+            </a:r>
+            <a:endParaRPr lang="en-US" dirty="0">
+              <a:solidFill>
+                <a:schemeClr val="tx1">
+                  <a:lumMod val="65000"/>
+                  <a:lumOff val="35000"/>
+                </a:schemeClr>
+              </a:solidFill>
+            </a:endParaRPr>
+          </a:p>
+        </p:txBody>
+      </p:sp>
+    </p:spTree>
+    <p:extLst>
+      <p:ext uri="{BB962C8B-B14F-4D97-AF65-F5344CB8AC3E}">
+        <p14:creationId xmlns:p14="http://schemas.microsoft.com/office/powerpoint/2010/main" val="1655939492"/>
+      </p:ext>
+    </p:extLst>
+  </p:cSld>
+  <p:clrMapOvr>
+    <a:masterClrMapping/>
+  </p:clrMapOvr>
+  <p:timing>
+    <p:tnLst>
+      <p:par>
+        <p:cTn id="1" dur="indefinite" restart="never" nodeType="tmRoot"/>
+      </p:par>
+    </p:tnLst>
+  </p:timing>
+</p:sld>
+</file>
+
+<file path=ppt/slides/slide18.xml><?xml version="1.0" encoding="utf-8"?>
+<p:sld xmlns:a="http://schemas.openxmlformats.org/drawingml/2006/main" xmlns:r="http://schemas.openxmlformats.org/officeDocument/2006/relationships" xmlns:p="http://schemas.openxmlformats.org/presentationml/2006/main">
+  <p:cSld>
+    <p:spTree>
+      <p:nvGrpSpPr>
+        <p:cNvPr id="1" name=""/>
+        <p:cNvGrpSpPr/>
+        <p:nvPr/>
+      </p:nvGrpSpPr>
+      <p:grpSpPr>
+        <a:xfrm>
+          <a:off x="0" y="0"/>
+          <a:ext cx="0" cy="0"/>
+          <a:chOff x="0" y="0"/>
+          <a:chExt cx="0" cy="0"/>
+        </a:xfrm>
+      </p:grpSpPr>
+      <p:sp>
+        <p:nvSpPr>
+          <p:cNvPr id="2" name="Title 1"/>
+          <p:cNvSpPr>
+            <a:spLocks noGrp="1"/>
+          </p:cNvSpPr>
+          <p:nvPr>
+            <p:ph type="ctrTitle"/>
+          </p:nvPr>
+        </p:nvSpPr>
+        <p:spPr>
+          <a:xfrm>
+            <a:off x="2306782" y="2438328"/>
+            <a:ext cx="7578436" cy="2327419"/>
+          </a:xfrm>
+        </p:spPr>
+        <p:txBody>
+          <a:bodyPr>
+            <a:normAutofit fontScale="90000"/>
+          </a:bodyPr>
+          <a:lstStyle/>
+          <a:p>
+            <a:r>
+              <a:rPr lang="en-US" b="1" dirty="0" smtClean="0"/>
+              <a:t>2. </a:t>
+            </a:r>
+            <a:r>
+              <a:rPr lang="en-US" b="1" dirty="0" err="1" smtClean="0"/>
+              <a:t>Một</a:t>
+            </a:r>
+            <a:r>
+              <a:rPr lang="en-US" b="1" dirty="0" smtClean="0"/>
+              <a:t> </a:t>
+            </a:r>
+            <a:r>
+              <a:rPr lang="en-US" b="1" dirty="0" err="1"/>
+              <a:t>số</a:t>
+            </a:r>
+            <a:r>
+              <a:rPr lang="en-US" b="1" dirty="0"/>
+              <a:t> </a:t>
+            </a:r>
+            <a:r>
+              <a:rPr lang="en-US" b="1" dirty="0" err="1"/>
+              <a:t>thư</a:t>
+            </a:r>
+            <a:r>
+              <a:rPr lang="en-US" b="1" dirty="0"/>
+              <a:t> </a:t>
+            </a:r>
+            <a:r>
+              <a:rPr lang="en-US" b="1" dirty="0" err="1"/>
+              <a:t>viện</a:t>
+            </a:r>
+            <a:r>
+              <a:rPr lang="en-US" b="1" dirty="0"/>
+              <a:t> </a:t>
+            </a:r>
+            <a:r>
+              <a:rPr lang="en-US" b="1" dirty="0" err="1"/>
+              <a:t>phổ</a:t>
+            </a:r>
+            <a:r>
+              <a:rPr lang="en-US" b="1" dirty="0"/>
+              <a:t> </a:t>
+            </a:r>
+            <a:r>
+              <a:rPr lang="en-US" b="1" dirty="0" err="1"/>
+              <a:t>biến</a:t>
+            </a:r>
+            <a:r>
+              <a:rPr lang="en-US" b="1" dirty="0"/>
+              <a:t/>
+            </a:r>
+            <a:br>
+              <a:rPr lang="en-US" b="1" dirty="0"/>
+            </a:br>
+            <a:endParaRPr lang="en-US" b="1" dirty="0"/>
+          </a:p>
+        </p:txBody>
+      </p:sp>
+      <p:sp>
+        <p:nvSpPr>
+          <p:cNvPr id="3" name="Subtitle 2"/>
+          <p:cNvSpPr>
+            <a:spLocks noGrp="1"/>
+          </p:cNvSpPr>
+          <p:nvPr>
+            <p:ph type="subTitle" idx="1"/>
+          </p:nvPr>
+        </p:nvSpPr>
+        <p:spPr/>
+        <p:txBody>
+          <a:bodyPr/>
+          <a:lstStyle/>
+          <a:p>
+            <a:endParaRPr lang="en-US"/>
+          </a:p>
+        </p:txBody>
+      </p:sp>
+    </p:spTree>
+    <p:extLst>
+      <p:ext uri="{BB962C8B-B14F-4D97-AF65-F5344CB8AC3E}">
+        <p14:creationId xmlns:p14="http://schemas.microsoft.com/office/powerpoint/2010/main" val="2430031693"/>
+      </p:ext>
+    </p:extLst>
+  </p:cSld>
+  <p:clrMapOvr>
+    <a:masterClrMapping/>
+  </p:clrMapOvr>
+  <p:timing>
+    <p:tnLst>
+      <p:par>
+        <p:cTn id="1" dur="indefinite" restart="never" nodeType="tmRoot"/>
+      </p:par>
+    </p:tnLst>
+  </p:timing>
+</p:sld>
+</file>
+
+<file path=ppt/slides/slide19.xml><?xml version="1.0" encoding="utf-8"?>
+<p:sld xmlns:a="http://schemas.openxmlformats.org/drawingml/2006/main" xmlns:r="http://schemas.openxmlformats.org/officeDocument/2006/relationships" xmlns:p="http://schemas.openxmlformats.org/presentationml/2006/main">
+  <p:cSld>
+    <p:spTree>
+      <p:nvGrpSpPr>
+        <p:cNvPr id="1" name=""/>
+        <p:cNvGrpSpPr/>
+        <p:nvPr/>
+      </p:nvGrpSpPr>
+      <p:grpSpPr>
+        <a:xfrm>
+          <a:off x="0" y="0"/>
+          <a:ext cx="0" cy="0"/>
+          <a:chOff x="0" y="0"/>
+          <a:chExt cx="0" cy="0"/>
+        </a:xfrm>
+      </p:grpSpPr>
+      <p:sp>
+        <p:nvSpPr>
+          <p:cNvPr id="2" name="Title 1"/>
+          <p:cNvSpPr>
+            <a:spLocks noGrp="1"/>
+          </p:cNvSpPr>
+          <p:nvPr>
+            <p:ph type="title"/>
+          </p:nvPr>
+        </p:nvSpPr>
+        <p:spPr/>
+        <p:txBody>
+          <a:bodyPr/>
+          <a:lstStyle/>
+          <a:p>
+            <a:endParaRPr lang="en-US"/>
+          </a:p>
+        </p:txBody>
+      </p:sp>
+      <p:pic>
+        <p:nvPicPr>
+          <p:cNvPr id="4" name="Content Placeholder 3"/>
+          <p:cNvPicPr>
+            <a:picLocks noGrp="1" noChangeAspect="1"/>
+          </p:cNvPicPr>
+          <p:nvPr>
+            <p:ph idx="1"/>
+          </p:nvPr>
+        </p:nvPicPr>
+        <p:blipFill>
+          <a:blip r:embed="rId2">
+            <a:extLst>
+              <a:ext uri="{28A0092B-C50C-407E-A947-70E740481C1C}">
+                <a14:useLocalDpi xmlns:a14="http://schemas.microsoft.com/office/drawing/2010/main" val="0"/>
+              </a:ext>
+            </a:extLst>
+          </a:blip>
+          <a:stretch>
+            <a:fillRect/>
+          </a:stretch>
+        </p:blipFill>
+        <p:spPr>
+          <a:xfrm>
+            <a:off x="3864968" y="441217"/>
+            <a:ext cx="4462063" cy="5602742"/>
+          </a:xfrm>
+        </p:spPr>
+      </p:pic>
+      <p:sp>
+        <p:nvSpPr>
+          <p:cNvPr id="5" name="TextBox 4"/>
+          <p:cNvSpPr txBox="1"/>
+          <p:nvPr/>
+        </p:nvSpPr>
+        <p:spPr>
+          <a:xfrm>
+            <a:off x="4942951" y="6128970"/>
+            <a:ext cx="2523448" cy="369332"/>
+          </a:xfrm>
+          <a:prstGeom prst="rect">
+            <a:avLst/>
+          </a:prstGeom>
+          <a:noFill/>
+        </p:spPr>
+        <p:txBody>
+          <a:bodyPr wrap="none" rtlCol="0">
+            <a:spAutoFit/>
+          </a:bodyPr>
+          <a:lstStyle/>
+          <a:p>
+            <a:r>
+              <a:rPr lang="en-US" i="1" dirty="0" err="1" smtClean="0">
+                <a:solidFill>
+                  <a:schemeClr val="tx1">
+                    <a:lumMod val="65000"/>
+                    <a:lumOff val="35000"/>
+                  </a:schemeClr>
+                </a:solidFill>
+              </a:rPr>
+              <a:t>Một</a:t>
+            </a:r>
+            <a:r>
+              <a:rPr lang="en-US" i="1" dirty="0">
+                <a:solidFill>
+                  <a:schemeClr val="tx1">
+                    <a:lumMod val="65000"/>
+                    <a:lumOff val="35000"/>
+                  </a:schemeClr>
+                </a:solidFill>
+              </a:rPr>
+              <a:t> </a:t>
+            </a:r>
+            <a:r>
+              <a:rPr lang="en-US" i="1" dirty="0" err="1" smtClean="0">
+                <a:solidFill>
+                  <a:schemeClr val="tx1">
+                    <a:lumMod val="65000"/>
+                    <a:lumOff val="35000"/>
+                  </a:schemeClr>
+                </a:solidFill>
+              </a:rPr>
+              <a:t>số</a:t>
+            </a:r>
+            <a:r>
+              <a:rPr lang="en-US" i="1" dirty="0" smtClean="0">
+                <a:solidFill>
+                  <a:schemeClr val="tx1">
+                    <a:lumMod val="65000"/>
+                    <a:lumOff val="35000"/>
+                  </a:schemeClr>
+                </a:solidFill>
+              </a:rPr>
+              <a:t> </a:t>
+            </a:r>
+            <a:r>
+              <a:rPr lang="en-US" i="1" dirty="0" err="1" smtClean="0">
+                <a:solidFill>
+                  <a:schemeClr val="tx1">
+                    <a:lumMod val="65000"/>
+                    <a:lumOff val="35000"/>
+                  </a:schemeClr>
+                </a:solidFill>
+              </a:rPr>
+              <a:t>thư</a:t>
+            </a:r>
+            <a:r>
+              <a:rPr lang="en-US" i="1" dirty="0" smtClean="0">
+                <a:solidFill>
+                  <a:schemeClr val="tx1">
+                    <a:lumMod val="65000"/>
+                    <a:lumOff val="35000"/>
+                  </a:schemeClr>
+                </a:solidFill>
+              </a:rPr>
+              <a:t> </a:t>
+            </a:r>
+            <a:r>
+              <a:rPr lang="en-US" i="1" dirty="0" err="1" smtClean="0">
+                <a:solidFill>
+                  <a:schemeClr val="tx1">
+                    <a:lumMod val="65000"/>
+                    <a:lumOff val="35000"/>
+                  </a:schemeClr>
+                </a:solidFill>
+              </a:rPr>
+              <a:t>viện</a:t>
+            </a:r>
+            <a:r>
+              <a:rPr lang="en-US" i="1" dirty="0" smtClean="0">
+                <a:solidFill>
+                  <a:schemeClr val="tx1">
+                    <a:lumMod val="65000"/>
+                    <a:lumOff val="35000"/>
+                  </a:schemeClr>
+                </a:solidFill>
+              </a:rPr>
+              <a:t> </a:t>
+            </a:r>
+            <a:r>
+              <a:rPr lang="en-US" i="1" dirty="0" err="1" smtClean="0">
+                <a:solidFill>
+                  <a:schemeClr val="tx1">
+                    <a:lumMod val="65000"/>
+                    <a:lumOff val="35000"/>
+                  </a:schemeClr>
+                </a:solidFill>
+              </a:rPr>
+              <a:t>phổ</a:t>
+            </a:r>
+            <a:r>
+              <a:rPr lang="en-US" i="1" dirty="0" smtClean="0">
+                <a:solidFill>
+                  <a:schemeClr val="tx1">
+                    <a:lumMod val="65000"/>
+                    <a:lumOff val="35000"/>
+                  </a:schemeClr>
+                </a:solidFill>
+              </a:rPr>
+              <a:t> </a:t>
+            </a:r>
+            <a:r>
+              <a:rPr lang="en-US" i="1" dirty="0" err="1" smtClean="0">
+                <a:solidFill>
+                  <a:schemeClr val="tx1">
+                    <a:lumMod val="65000"/>
+                    <a:lumOff val="35000"/>
+                  </a:schemeClr>
+                </a:solidFill>
+              </a:rPr>
+              <a:t>biến</a:t>
+            </a:r>
+            <a:endParaRPr lang="en-US" i="1" dirty="0">
+              <a:solidFill>
+                <a:schemeClr val="tx1">
+                  <a:lumMod val="65000"/>
+                  <a:lumOff val="35000"/>
+                </a:schemeClr>
+              </a:solidFill>
+            </a:endParaRPr>
+          </a:p>
+        </p:txBody>
+      </p:sp>
+    </p:spTree>
+    <p:extLst>
+      <p:ext uri="{BB962C8B-B14F-4D97-AF65-F5344CB8AC3E}">
+        <p14:creationId xmlns:p14="http://schemas.microsoft.com/office/powerpoint/2010/main" val="939098720"/>
+      </p:ext>
+    </p:extLst>
+  </p:cSld>
+  <p:clrMapOvr>
+    <a:masterClrMapping/>
+  </p:clrMapOvr>
+  <p:timing>
+    <p:tnLst>
+      <p:par>
+        <p:cTn id="1" dur="indefinite" restart="never" nodeType="tmRoot"/>
+      </p:par>
+    </p:tnLst>
+  </p:timing>
+</p:sld>
+</file>
+
 <file path=ppt/slides/slide2.xml><?xml version="1.0" encoding="utf-8"?>
 <p:sld xmlns:a="http://schemas.openxmlformats.org/drawingml/2006/main" xmlns:r="http://schemas.openxmlformats.org/officeDocument/2006/relationships" xmlns:p="http://schemas.openxmlformats.org/presentationml/2006/main">
   <p:cSld>
@@ -3328,6 +5511,1232 @@
     <p:extLst>
       <p:ext uri="{BB962C8B-B14F-4D97-AF65-F5344CB8AC3E}">
         <p14:creationId xmlns:p14="http://schemas.microsoft.com/office/powerpoint/2010/main" val="601844317"/>
+      </p:ext>
+    </p:extLst>
+  </p:cSld>
+  <p:clrMapOvr>
+    <a:masterClrMapping/>
+  </p:clrMapOvr>
+  <p:timing>
+    <p:tnLst>
+      <p:par>
+        <p:cTn id="1" dur="indefinite" restart="never" nodeType="tmRoot"/>
+      </p:par>
+    </p:tnLst>
+  </p:timing>
+</p:sld>
+</file>
+
+<file path=ppt/slides/slide20.xml><?xml version="1.0" encoding="utf-8"?>
+<p:sld xmlns:a="http://schemas.openxmlformats.org/drawingml/2006/main" xmlns:r="http://schemas.openxmlformats.org/officeDocument/2006/relationships" xmlns:p="http://schemas.openxmlformats.org/presentationml/2006/main">
+  <p:cSld>
+    <p:spTree>
+      <p:nvGrpSpPr>
+        <p:cNvPr id="1" name=""/>
+        <p:cNvGrpSpPr/>
+        <p:nvPr/>
+      </p:nvGrpSpPr>
+      <p:grpSpPr>
+        <a:xfrm>
+          <a:off x="0" y="0"/>
+          <a:ext cx="0" cy="0"/>
+          <a:chOff x="0" y="0"/>
+          <a:chExt cx="0" cy="0"/>
+        </a:xfrm>
+      </p:grpSpPr>
+      <p:sp>
+        <p:nvSpPr>
+          <p:cNvPr id="3" name="Subtitle 2"/>
+          <p:cNvSpPr>
+            <a:spLocks noGrp="1"/>
+          </p:cNvSpPr>
+          <p:nvPr>
+            <p:ph type="subTitle" idx="1"/>
+          </p:nvPr>
+        </p:nvSpPr>
+        <p:spPr/>
+        <p:txBody>
+          <a:bodyPr/>
+          <a:lstStyle/>
+          <a:p>
+            <a:endParaRPr lang="en-US"/>
+          </a:p>
+        </p:txBody>
+      </p:sp>
+      <p:pic>
+        <p:nvPicPr>
+          <p:cNvPr id="4" name="Picture 3"/>
+          <p:cNvPicPr>
+            <a:picLocks noChangeAspect="1"/>
+          </p:cNvPicPr>
+          <p:nvPr/>
+        </p:nvPicPr>
+        <p:blipFill>
+          <a:blip r:embed="rId2">
+            <a:extLst>
+              <a:ext uri="{28A0092B-C50C-407E-A947-70E740481C1C}">
+                <a14:useLocalDpi xmlns:a14="http://schemas.microsoft.com/office/drawing/2010/main" val="0"/>
+              </a:ext>
+            </a:extLst>
+          </a:blip>
+          <a:stretch>
+            <a:fillRect/>
+          </a:stretch>
+        </p:blipFill>
+        <p:spPr>
+          <a:xfrm>
+            <a:off x="2924175" y="1925985"/>
+            <a:ext cx="6343650" cy="2857500"/>
+          </a:xfrm>
+          <a:prstGeom prst="rect">
+            <a:avLst/>
+          </a:prstGeom>
+        </p:spPr>
+      </p:pic>
+      <p:sp>
+        <p:nvSpPr>
+          <p:cNvPr id="5" name="Title 4"/>
+          <p:cNvSpPr>
+            <a:spLocks noGrp="1"/>
+          </p:cNvSpPr>
+          <p:nvPr>
+            <p:ph type="ctrTitle"/>
+          </p:nvPr>
+        </p:nvSpPr>
+        <p:spPr/>
+        <p:txBody>
+          <a:bodyPr/>
+          <a:lstStyle/>
+          <a:p>
+            <a:endParaRPr lang="en-US"/>
+          </a:p>
+        </p:txBody>
+      </p:sp>
+    </p:spTree>
+    <p:extLst>
+      <p:ext uri="{BB962C8B-B14F-4D97-AF65-F5344CB8AC3E}">
+        <p14:creationId xmlns:p14="http://schemas.microsoft.com/office/powerpoint/2010/main" val="938003649"/>
+      </p:ext>
+    </p:extLst>
+  </p:cSld>
+  <p:clrMapOvr>
+    <a:masterClrMapping/>
+  </p:clrMapOvr>
+  <p:timing>
+    <p:tnLst>
+      <p:par>
+        <p:cTn id="1" dur="indefinite" restart="never" nodeType="tmRoot"/>
+      </p:par>
+    </p:tnLst>
+  </p:timing>
+</p:sld>
+</file>
+
+<file path=ppt/slides/slide21.xml><?xml version="1.0" encoding="utf-8"?>
+<p:sld xmlns:a="http://schemas.openxmlformats.org/drawingml/2006/main" xmlns:r="http://schemas.openxmlformats.org/officeDocument/2006/relationships" xmlns:p="http://schemas.openxmlformats.org/presentationml/2006/main">
+  <p:cSld>
+    <p:spTree>
+      <p:nvGrpSpPr>
+        <p:cNvPr id="1" name=""/>
+        <p:cNvGrpSpPr/>
+        <p:nvPr/>
+      </p:nvGrpSpPr>
+      <p:grpSpPr>
+        <a:xfrm>
+          <a:off x="0" y="0"/>
+          <a:ext cx="0" cy="0"/>
+          <a:chOff x="0" y="0"/>
+          <a:chExt cx="0" cy="0"/>
+        </a:xfrm>
+      </p:grpSpPr>
+      <p:sp>
+        <p:nvSpPr>
+          <p:cNvPr id="2" name="Title 1"/>
+          <p:cNvSpPr>
+            <a:spLocks noGrp="1"/>
+          </p:cNvSpPr>
+          <p:nvPr>
+            <p:ph type="title"/>
+          </p:nvPr>
+        </p:nvSpPr>
+        <p:spPr/>
+        <p:txBody>
+          <a:bodyPr/>
+          <a:lstStyle/>
+          <a:p>
+            <a:endParaRPr lang="en-US"/>
+          </a:p>
+        </p:txBody>
+      </p:sp>
+      <p:pic>
+        <p:nvPicPr>
+          <p:cNvPr id="4" name="Content Placeholder 3"/>
+          <p:cNvPicPr>
+            <a:picLocks noGrp="1" noChangeAspect="1"/>
+          </p:cNvPicPr>
+          <p:nvPr>
+            <p:ph idx="1"/>
+          </p:nvPr>
+        </p:nvPicPr>
+        <p:blipFill>
+          <a:blip r:embed="rId2">
+            <a:extLst>
+              <a:ext uri="{28A0092B-C50C-407E-A947-70E740481C1C}">
+                <a14:useLocalDpi xmlns:a14="http://schemas.microsoft.com/office/drawing/2010/main" val="0"/>
+              </a:ext>
+            </a:extLst>
+          </a:blip>
+          <a:stretch>
+            <a:fillRect/>
+          </a:stretch>
+        </p:blipFill>
+        <p:spPr>
+          <a:xfrm>
+            <a:off x="1667986" y="1238250"/>
+            <a:ext cx="8856028" cy="4428014"/>
+          </a:xfrm>
+        </p:spPr>
+      </p:pic>
+    </p:spTree>
+    <p:extLst>
+      <p:ext uri="{BB962C8B-B14F-4D97-AF65-F5344CB8AC3E}">
+        <p14:creationId xmlns:p14="http://schemas.microsoft.com/office/powerpoint/2010/main" val="2096351639"/>
+      </p:ext>
+    </p:extLst>
+  </p:cSld>
+  <p:clrMapOvr>
+    <a:masterClrMapping/>
+  </p:clrMapOvr>
+  <p:timing>
+    <p:tnLst>
+      <p:par>
+        <p:cTn id="1" dur="indefinite" restart="never" nodeType="tmRoot"/>
+      </p:par>
+    </p:tnLst>
+  </p:timing>
+</p:sld>
+</file>
+
+<file path=ppt/slides/slide22.xml><?xml version="1.0" encoding="utf-8"?>
+<p:sld xmlns:a="http://schemas.openxmlformats.org/drawingml/2006/main" xmlns:r="http://schemas.openxmlformats.org/officeDocument/2006/relationships" xmlns:p="http://schemas.openxmlformats.org/presentationml/2006/main">
+  <p:cSld>
+    <p:spTree>
+      <p:nvGrpSpPr>
+        <p:cNvPr id="1" name=""/>
+        <p:cNvGrpSpPr/>
+        <p:nvPr/>
+      </p:nvGrpSpPr>
+      <p:grpSpPr>
+        <a:xfrm>
+          <a:off x="0" y="0"/>
+          <a:ext cx="0" cy="0"/>
+          <a:chOff x="0" y="0"/>
+          <a:chExt cx="0" cy="0"/>
+        </a:xfrm>
+      </p:grpSpPr>
+      <p:sp>
+        <p:nvSpPr>
+          <p:cNvPr id="2" name="Title 1"/>
+          <p:cNvSpPr>
+            <a:spLocks noGrp="1"/>
+          </p:cNvSpPr>
+          <p:nvPr>
+            <p:ph type="title"/>
+          </p:nvPr>
+        </p:nvSpPr>
+        <p:spPr/>
+        <p:txBody>
+          <a:bodyPr/>
+          <a:lstStyle/>
+          <a:p>
+            <a:endParaRPr lang="en-US"/>
+          </a:p>
+        </p:txBody>
+      </p:sp>
+      <p:pic>
+        <p:nvPicPr>
+          <p:cNvPr id="4" name="Content Placeholder 3"/>
+          <p:cNvPicPr>
+            <a:picLocks noGrp="1" noChangeAspect="1"/>
+          </p:cNvPicPr>
+          <p:nvPr>
+            <p:ph idx="1"/>
+          </p:nvPr>
+        </p:nvPicPr>
+        <p:blipFill>
+          <a:blip r:embed="rId2">
+            <a:extLst>
+              <a:ext uri="{28A0092B-C50C-407E-A947-70E740481C1C}">
+                <a14:useLocalDpi xmlns:a14="http://schemas.microsoft.com/office/drawing/2010/main" val="0"/>
+              </a:ext>
+            </a:extLst>
+          </a:blip>
+          <a:stretch>
+            <a:fillRect/>
+          </a:stretch>
+        </p:blipFill>
+        <p:spPr>
+          <a:xfrm>
+            <a:off x="1067991" y="1690688"/>
+            <a:ext cx="10056018" cy="3352006"/>
+          </a:xfrm>
+        </p:spPr>
+      </p:pic>
+    </p:spTree>
+    <p:extLst>
+      <p:ext uri="{BB962C8B-B14F-4D97-AF65-F5344CB8AC3E}">
+        <p14:creationId xmlns:p14="http://schemas.microsoft.com/office/powerpoint/2010/main" val="1427559741"/>
+      </p:ext>
+    </p:extLst>
+  </p:cSld>
+  <p:clrMapOvr>
+    <a:masterClrMapping/>
+  </p:clrMapOvr>
+  <p:timing>
+    <p:tnLst>
+      <p:par>
+        <p:cTn id="1" dur="indefinite" restart="never" nodeType="tmRoot"/>
+      </p:par>
+    </p:tnLst>
+  </p:timing>
+</p:sld>
+</file>
+
+<file path=ppt/slides/slide23.xml><?xml version="1.0" encoding="utf-8"?>
+<p:sld xmlns:a="http://schemas.openxmlformats.org/drawingml/2006/main" xmlns:r="http://schemas.openxmlformats.org/officeDocument/2006/relationships" xmlns:p="http://schemas.openxmlformats.org/presentationml/2006/main">
+  <p:cSld>
+    <p:spTree>
+      <p:nvGrpSpPr>
+        <p:cNvPr id="1" name=""/>
+        <p:cNvGrpSpPr/>
+        <p:nvPr/>
+      </p:nvGrpSpPr>
+      <p:grpSpPr>
+        <a:xfrm>
+          <a:off x="0" y="0"/>
+          <a:ext cx="0" cy="0"/>
+          <a:chOff x="0" y="0"/>
+          <a:chExt cx="0" cy="0"/>
+        </a:xfrm>
+      </p:grpSpPr>
+      <p:sp>
+        <p:nvSpPr>
+          <p:cNvPr id="2" name="Title 1"/>
+          <p:cNvSpPr>
+            <a:spLocks noGrp="1"/>
+          </p:cNvSpPr>
+          <p:nvPr>
+            <p:ph type="title"/>
+          </p:nvPr>
+        </p:nvSpPr>
+        <p:spPr/>
+        <p:txBody>
+          <a:bodyPr/>
+          <a:lstStyle/>
+          <a:p>
+            <a:endParaRPr lang="en-US"/>
+          </a:p>
+        </p:txBody>
+      </p:sp>
+      <p:pic>
+        <p:nvPicPr>
+          <p:cNvPr id="6" name="Content Placeholder 5"/>
+          <p:cNvPicPr>
+            <a:picLocks noGrp="1" noChangeAspect="1"/>
+          </p:cNvPicPr>
+          <p:nvPr>
+            <p:ph idx="1"/>
+          </p:nvPr>
+        </p:nvPicPr>
+        <p:blipFill>
+          <a:blip r:embed="rId2">
+            <a:extLst>
+              <a:ext uri="{28A0092B-C50C-407E-A947-70E740481C1C}">
+                <a14:useLocalDpi xmlns:a14="http://schemas.microsoft.com/office/drawing/2010/main" val="0"/>
+              </a:ext>
+            </a:extLst>
+          </a:blip>
+          <a:stretch>
+            <a:fillRect/>
+          </a:stretch>
+        </p:blipFill>
+        <p:spPr>
+          <a:xfrm>
+            <a:off x="1962944" y="1219994"/>
+            <a:ext cx="8266112" cy="4133056"/>
+          </a:xfrm>
+        </p:spPr>
+      </p:pic>
+    </p:spTree>
+    <p:extLst>
+      <p:ext uri="{BB962C8B-B14F-4D97-AF65-F5344CB8AC3E}">
+        <p14:creationId xmlns:p14="http://schemas.microsoft.com/office/powerpoint/2010/main" val="2210549913"/>
+      </p:ext>
+    </p:extLst>
+  </p:cSld>
+  <p:clrMapOvr>
+    <a:masterClrMapping/>
+  </p:clrMapOvr>
+  <p:timing>
+    <p:tnLst>
+      <p:par>
+        <p:cTn id="1" dur="indefinite" restart="never" nodeType="tmRoot"/>
+      </p:par>
+    </p:tnLst>
+  </p:timing>
+</p:sld>
+</file>
+
+<file path=ppt/slides/slide24.xml><?xml version="1.0" encoding="utf-8"?>
+<p:sld xmlns:a="http://schemas.openxmlformats.org/drawingml/2006/main" xmlns:r="http://schemas.openxmlformats.org/officeDocument/2006/relationships" xmlns:p="http://schemas.openxmlformats.org/presentationml/2006/main">
+  <p:cSld>
+    <p:spTree>
+      <p:nvGrpSpPr>
+        <p:cNvPr id="1" name=""/>
+        <p:cNvGrpSpPr/>
+        <p:nvPr/>
+      </p:nvGrpSpPr>
+      <p:grpSpPr>
+        <a:xfrm>
+          <a:off x="0" y="0"/>
+          <a:ext cx="0" cy="0"/>
+          <a:chOff x="0" y="0"/>
+          <a:chExt cx="0" cy="0"/>
+        </a:xfrm>
+      </p:grpSpPr>
+      <p:sp>
+        <p:nvSpPr>
+          <p:cNvPr id="2" name="Title 1"/>
+          <p:cNvSpPr>
+            <a:spLocks noGrp="1"/>
+          </p:cNvSpPr>
+          <p:nvPr>
+            <p:ph type="ctrTitle"/>
+          </p:nvPr>
+        </p:nvSpPr>
+        <p:spPr>
+          <a:xfrm>
+            <a:off x="2306782" y="2102500"/>
+            <a:ext cx="7578436" cy="2327419"/>
+          </a:xfrm>
+        </p:spPr>
+        <p:txBody>
+          <a:bodyPr>
+            <a:normAutofit/>
+          </a:bodyPr>
+          <a:lstStyle/>
+          <a:p>
+            <a:r>
+              <a:rPr lang="en-US" b="1" dirty="0" smtClean="0"/>
+              <a:t>3. </a:t>
+            </a:r>
+            <a:r>
+              <a:rPr lang="en-US" b="1" dirty="0" err="1" smtClean="0"/>
+              <a:t>Tìm</a:t>
+            </a:r>
+            <a:r>
+              <a:rPr lang="en-US" b="1" dirty="0" smtClean="0"/>
+              <a:t> </a:t>
+            </a:r>
+            <a:r>
+              <a:rPr lang="en-US" b="1" dirty="0" err="1" smtClean="0"/>
+              <a:t>hiểu</a:t>
+            </a:r>
+            <a:r>
+              <a:rPr lang="en-US" b="1" dirty="0" smtClean="0"/>
+              <a:t> </a:t>
+            </a:r>
+            <a:r>
+              <a:rPr lang="en-US" b="1" dirty="0" err="1" smtClean="0"/>
+              <a:t>về</a:t>
+            </a:r>
+            <a:r>
+              <a:rPr lang="en-US" b="1" dirty="0" smtClean="0"/>
+              <a:t> Notebook </a:t>
+            </a:r>
+            <a:r>
+              <a:rPr lang="en-US" b="1" dirty="0" err="1" smtClean="0"/>
+              <a:t>và</a:t>
+            </a:r>
+            <a:r>
+              <a:rPr lang="en-US" b="1" dirty="0" smtClean="0"/>
+              <a:t> </a:t>
+            </a:r>
+            <a:r>
+              <a:rPr lang="en-US" b="1" dirty="0" err="1" smtClean="0"/>
+              <a:t>nguồn</a:t>
+            </a:r>
+            <a:r>
+              <a:rPr lang="en-US" b="1" dirty="0" smtClean="0"/>
+              <a:t> </a:t>
+            </a:r>
+            <a:r>
+              <a:rPr lang="en-US" b="1" dirty="0" err="1" smtClean="0"/>
+              <a:t>dữ</a:t>
+            </a:r>
+            <a:r>
+              <a:rPr lang="en-US" b="1" dirty="0" smtClean="0"/>
+              <a:t> </a:t>
+            </a:r>
+            <a:r>
+              <a:rPr lang="en-US" b="1" dirty="0" err="1" smtClean="0"/>
+              <a:t>liệu</a:t>
+            </a:r>
+            <a:endParaRPr lang="en-US" b="1" dirty="0"/>
+          </a:p>
+        </p:txBody>
+      </p:sp>
+      <p:sp>
+        <p:nvSpPr>
+          <p:cNvPr id="3" name="Subtitle 2"/>
+          <p:cNvSpPr>
+            <a:spLocks noGrp="1"/>
+          </p:cNvSpPr>
+          <p:nvPr>
+            <p:ph type="subTitle" idx="1"/>
+          </p:nvPr>
+        </p:nvSpPr>
+        <p:spPr/>
+        <p:txBody>
+          <a:bodyPr/>
+          <a:lstStyle/>
+          <a:p>
+            <a:endParaRPr lang="en-US"/>
+          </a:p>
+        </p:txBody>
+      </p:sp>
+    </p:spTree>
+    <p:extLst>
+      <p:ext uri="{BB962C8B-B14F-4D97-AF65-F5344CB8AC3E}">
+        <p14:creationId xmlns:p14="http://schemas.microsoft.com/office/powerpoint/2010/main" val="4197449567"/>
+      </p:ext>
+    </p:extLst>
+  </p:cSld>
+  <p:clrMapOvr>
+    <a:masterClrMapping/>
+  </p:clrMapOvr>
+  <p:timing>
+    <p:tnLst>
+      <p:par>
+        <p:cTn id="1" dur="indefinite" restart="never" nodeType="tmRoot"/>
+      </p:par>
+    </p:tnLst>
+  </p:timing>
+</p:sld>
+</file>
+
+<file path=ppt/slides/slide25.xml><?xml version="1.0" encoding="utf-8"?>
+<p:sld xmlns:a="http://schemas.openxmlformats.org/drawingml/2006/main" xmlns:r="http://schemas.openxmlformats.org/officeDocument/2006/relationships" xmlns:p="http://schemas.openxmlformats.org/presentationml/2006/main">
+  <p:cSld>
+    <p:spTree>
+      <p:nvGrpSpPr>
+        <p:cNvPr id="1" name=""/>
+        <p:cNvGrpSpPr/>
+        <p:nvPr/>
+      </p:nvGrpSpPr>
+      <p:grpSpPr>
+        <a:xfrm>
+          <a:off x="0" y="0"/>
+          <a:ext cx="0" cy="0"/>
+          <a:chOff x="0" y="0"/>
+          <a:chExt cx="0" cy="0"/>
+        </a:xfrm>
+      </p:grpSpPr>
+      <p:sp>
+        <p:nvSpPr>
+          <p:cNvPr id="2" name="Title 1"/>
+          <p:cNvSpPr>
+            <a:spLocks noGrp="1"/>
+          </p:cNvSpPr>
+          <p:nvPr>
+            <p:ph type="title"/>
+          </p:nvPr>
+        </p:nvSpPr>
+        <p:spPr>
+          <a:xfrm>
+            <a:off x="828675" y="401637"/>
+            <a:ext cx="10515600" cy="1325563"/>
+          </a:xfrm>
+        </p:spPr>
+        <p:txBody>
+          <a:bodyPr/>
+          <a:lstStyle/>
+          <a:p>
+            <a:r>
+              <a:rPr lang="en-US" b="1" dirty="0"/>
+              <a:t>3. </a:t>
+            </a:r>
+            <a:r>
+              <a:rPr lang="en-US" b="1" dirty="0" err="1"/>
+              <a:t>Tìm</a:t>
+            </a:r>
+            <a:r>
+              <a:rPr lang="en-US" b="1" dirty="0"/>
+              <a:t> </a:t>
+            </a:r>
+            <a:r>
+              <a:rPr lang="en-US" b="1" dirty="0" err="1"/>
+              <a:t>hiểu</a:t>
+            </a:r>
+            <a:r>
+              <a:rPr lang="en-US" b="1" dirty="0"/>
+              <a:t> </a:t>
+            </a:r>
+            <a:r>
+              <a:rPr lang="en-US" b="1" dirty="0" err="1"/>
+              <a:t>về</a:t>
+            </a:r>
+            <a:r>
+              <a:rPr lang="en-US" b="1" dirty="0"/>
+              <a:t> Notebook </a:t>
+            </a:r>
+            <a:r>
+              <a:rPr lang="en-US" b="1" dirty="0" err="1"/>
+              <a:t>và</a:t>
+            </a:r>
+            <a:r>
+              <a:rPr lang="en-US" b="1" dirty="0"/>
+              <a:t> </a:t>
+            </a:r>
+            <a:r>
+              <a:rPr lang="en-US" b="1" dirty="0" err="1"/>
+              <a:t>nguồn</a:t>
+            </a:r>
+            <a:r>
+              <a:rPr lang="en-US" b="1" dirty="0"/>
+              <a:t> </a:t>
+            </a:r>
+            <a:r>
+              <a:rPr lang="en-US" b="1" dirty="0" err="1"/>
+              <a:t>dữ</a:t>
+            </a:r>
+            <a:r>
+              <a:rPr lang="en-US" b="1" dirty="0"/>
+              <a:t> </a:t>
+            </a:r>
+            <a:r>
+              <a:rPr lang="en-US" b="1" dirty="0" err="1"/>
+              <a:t>liệu</a:t>
+            </a:r>
+            <a:endParaRPr lang="en-US" dirty="0"/>
+          </a:p>
+        </p:txBody>
+      </p:sp>
+      <p:sp>
+        <p:nvSpPr>
+          <p:cNvPr id="3" name="Content Placeholder 2"/>
+          <p:cNvSpPr>
+            <a:spLocks noGrp="1"/>
+          </p:cNvSpPr>
+          <p:nvPr>
+            <p:ph idx="1"/>
+          </p:nvPr>
+        </p:nvSpPr>
+        <p:spPr>
+          <a:xfrm>
+            <a:off x="838200" y="1482725"/>
+            <a:ext cx="10515600" cy="4351338"/>
+          </a:xfrm>
+        </p:spPr>
+        <p:txBody>
+          <a:bodyPr>
+            <a:normAutofit/>
+          </a:bodyPr>
+          <a:lstStyle/>
+          <a:p>
+            <a:r>
+              <a:rPr lang="vi-VN" sz="2000" b="1" dirty="0"/>
+              <a:t>a) Làm quen với </a:t>
+            </a:r>
+            <a:r>
+              <a:rPr lang="en-US" sz="2000" b="1" dirty="0" err="1"/>
+              <a:t>Jupyter</a:t>
+            </a:r>
+            <a:r>
+              <a:rPr lang="en-US" sz="2000" b="1" dirty="0"/>
+              <a:t> Notebooks, Google </a:t>
+            </a:r>
+            <a:r>
+              <a:rPr lang="en-US" sz="2000" b="1" dirty="0" err="1"/>
+              <a:t>Colab</a:t>
+            </a:r>
+            <a:r>
+              <a:rPr lang="en-US" sz="2000" b="1" dirty="0"/>
+              <a:t>, </a:t>
+            </a:r>
+            <a:r>
+              <a:rPr lang="en-US" sz="2000" b="1" dirty="0" err="1" smtClean="0"/>
+              <a:t>Kaggle</a:t>
+            </a:r>
+            <a:r>
+              <a:rPr lang="en-US" sz="2000" b="1" dirty="0" smtClean="0"/>
+              <a:t> </a:t>
+            </a:r>
+            <a:endParaRPr lang="en-US" sz="2000" b="1" dirty="0"/>
+          </a:p>
+          <a:p>
+            <a:endParaRPr lang="en-US" sz="2000" b="1" dirty="0"/>
+          </a:p>
+        </p:txBody>
+      </p:sp>
+      <p:pic>
+        <p:nvPicPr>
+          <p:cNvPr id="4" name="Picture 3"/>
+          <p:cNvPicPr/>
+          <p:nvPr/>
+        </p:nvPicPr>
+        <p:blipFill>
+          <a:blip r:embed="rId2" cstate="print">
+            <a:extLst>
+              <a:ext uri="{28A0092B-C50C-407E-A947-70E740481C1C}">
+                <a14:useLocalDpi xmlns:a14="http://schemas.microsoft.com/office/drawing/2010/main" val="0"/>
+              </a:ext>
+            </a:extLst>
+          </a:blip>
+          <a:stretch>
+            <a:fillRect/>
+          </a:stretch>
+        </p:blipFill>
+        <p:spPr>
+          <a:xfrm>
+            <a:off x="2781300" y="2019300"/>
+            <a:ext cx="6610349" cy="4524375"/>
+          </a:xfrm>
+          <a:prstGeom prst="rect">
+            <a:avLst/>
+          </a:prstGeom>
+        </p:spPr>
+      </p:pic>
+    </p:spTree>
+    <p:extLst>
+      <p:ext uri="{BB962C8B-B14F-4D97-AF65-F5344CB8AC3E}">
+        <p14:creationId xmlns:p14="http://schemas.microsoft.com/office/powerpoint/2010/main" val="4211322129"/>
+      </p:ext>
+    </p:extLst>
+  </p:cSld>
+  <p:clrMapOvr>
+    <a:masterClrMapping/>
+  </p:clrMapOvr>
+  <p:timing>
+    <p:tnLst>
+      <p:par>
+        <p:cTn id="1" dur="indefinite" restart="never" nodeType="tmRoot"/>
+      </p:par>
+    </p:tnLst>
+  </p:timing>
+</p:sld>
+</file>
+
+<file path=ppt/slides/slide26.xml><?xml version="1.0" encoding="utf-8"?>
+<p:sld xmlns:a="http://schemas.openxmlformats.org/drawingml/2006/main" xmlns:r="http://schemas.openxmlformats.org/officeDocument/2006/relationships" xmlns:p="http://schemas.openxmlformats.org/presentationml/2006/main">
+  <p:cSld>
+    <p:spTree>
+      <p:nvGrpSpPr>
+        <p:cNvPr id="1" name=""/>
+        <p:cNvGrpSpPr/>
+        <p:nvPr/>
+      </p:nvGrpSpPr>
+      <p:grpSpPr>
+        <a:xfrm>
+          <a:off x="0" y="0"/>
+          <a:ext cx="0" cy="0"/>
+          <a:chOff x="0" y="0"/>
+          <a:chExt cx="0" cy="0"/>
+        </a:xfrm>
+      </p:grpSpPr>
+      <p:sp>
+        <p:nvSpPr>
+          <p:cNvPr id="2" name="Title 1"/>
+          <p:cNvSpPr>
+            <a:spLocks noGrp="1"/>
+          </p:cNvSpPr>
+          <p:nvPr>
+            <p:ph type="title"/>
+          </p:nvPr>
+        </p:nvSpPr>
+        <p:spPr>
+          <a:xfrm>
+            <a:off x="828675" y="401637"/>
+            <a:ext cx="10515600" cy="1325563"/>
+          </a:xfrm>
+        </p:spPr>
+        <p:txBody>
+          <a:bodyPr/>
+          <a:lstStyle/>
+          <a:p>
+            <a:r>
+              <a:rPr lang="en-US" b="1" dirty="0"/>
+              <a:t>3. </a:t>
+            </a:r>
+            <a:r>
+              <a:rPr lang="en-US" b="1" dirty="0" err="1"/>
+              <a:t>Tìm</a:t>
+            </a:r>
+            <a:r>
+              <a:rPr lang="en-US" b="1" dirty="0"/>
+              <a:t> </a:t>
+            </a:r>
+            <a:r>
+              <a:rPr lang="en-US" b="1" dirty="0" err="1"/>
+              <a:t>hiểu</a:t>
+            </a:r>
+            <a:r>
+              <a:rPr lang="en-US" b="1" dirty="0"/>
+              <a:t> </a:t>
+            </a:r>
+            <a:r>
+              <a:rPr lang="en-US" b="1" dirty="0" err="1"/>
+              <a:t>về</a:t>
+            </a:r>
+            <a:r>
+              <a:rPr lang="en-US" b="1" dirty="0"/>
+              <a:t> Notebook </a:t>
+            </a:r>
+            <a:r>
+              <a:rPr lang="en-US" b="1" dirty="0" err="1"/>
+              <a:t>và</a:t>
+            </a:r>
+            <a:r>
+              <a:rPr lang="en-US" b="1" dirty="0"/>
+              <a:t> </a:t>
+            </a:r>
+            <a:r>
+              <a:rPr lang="en-US" b="1" dirty="0" err="1"/>
+              <a:t>nguồn</a:t>
+            </a:r>
+            <a:r>
+              <a:rPr lang="en-US" b="1" dirty="0"/>
+              <a:t> </a:t>
+            </a:r>
+            <a:r>
+              <a:rPr lang="en-US" b="1" dirty="0" err="1"/>
+              <a:t>dữ</a:t>
+            </a:r>
+            <a:r>
+              <a:rPr lang="en-US" b="1" dirty="0"/>
+              <a:t> </a:t>
+            </a:r>
+            <a:r>
+              <a:rPr lang="en-US" b="1" dirty="0" err="1"/>
+              <a:t>liệu</a:t>
+            </a:r>
+            <a:endParaRPr lang="en-US" dirty="0"/>
+          </a:p>
+        </p:txBody>
+      </p:sp>
+      <p:sp>
+        <p:nvSpPr>
+          <p:cNvPr id="3" name="Content Placeholder 2"/>
+          <p:cNvSpPr>
+            <a:spLocks noGrp="1"/>
+          </p:cNvSpPr>
+          <p:nvPr>
+            <p:ph idx="1"/>
+          </p:nvPr>
+        </p:nvSpPr>
+        <p:spPr>
+          <a:xfrm>
+            <a:off x="838200" y="1482725"/>
+            <a:ext cx="10515600" cy="4351338"/>
+          </a:xfrm>
+        </p:spPr>
+        <p:txBody>
+          <a:bodyPr>
+            <a:normAutofit/>
+          </a:bodyPr>
+          <a:lstStyle/>
+          <a:p>
+            <a:r>
+              <a:rPr lang="en-US" sz="2000" b="1" dirty="0"/>
+              <a:t>b</a:t>
+            </a:r>
+            <a:r>
+              <a:rPr lang="en-US" sz="2000" b="1" dirty="0" smtClean="0"/>
+              <a:t>) </a:t>
+            </a:r>
+            <a:r>
+              <a:rPr lang="en-US" sz="2000" b="1" dirty="0" err="1" smtClean="0"/>
+              <a:t>Tìm</a:t>
+            </a:r>
+            <a:r>
+              <a:rPr lang="en-US" sz="2000" b="1" dirty="0" smtClean="0"/>
+              <a:t> </a:t>
+            </a:r>
+            <a:r>
+              <a:rPr lang="en-US" sz="2000" b="1" dirty="0" err="1" smtClean="0"/>
+              <a:t>hiểu</a:t>
+            </a:r>
+            <a:r>
+              <a:rPr lang="en-US" sz="2000" b="1" dirty="0" smtClean="0"/>
+              <a:t> </a:t>
+            </a:r>
+            <a:r>
+              <a:rPr lang="en-US" sz="2000" b="1" dirty="0" err="1" smtClean="0"/>
+              <a:t>về</a:t>
+            </a:r>
+            <a:r>
+              <a:rPr lang="en-US" sz="2000" b="1" dirty="0" smtClean="0"/>
+              <a:t> </a:t>
+            </a:r>
+            <a:r>
+              <a:rPr lang="en-US" sz="2000" b="1" dirty="0" err="1" smtClean="0"/>
+              <a:t>nguồn</a:t>
+            </a:r>
+            <a:r>
+              <a:rPr lang="en-US" sz="2000" b="1" dirty="0" smtClean="0"/>
+              <a:t> </a:t>
+            </a:r>
+            <a:r>
+              <a:rPr lang="en-US" sz="2000" b="1" dirty="0" err="1" smtClean="0"/>
+              <a:t>dữ</a:t>
+            </a:r>
+            <a:r>
+              <a:rPr lang="en-US" sz="2000" b="1" dirty="0" smtClean="0"/>
+              <a:t> </a:t>
+            </a:r>
+            <a:r>
+              <a:rPr lang="en-US" sz="2000" b="1" dirty="0" err="1" smtClean="0"/>
+              <a:t>liệu</a:t>
+            </a:r>
+            <a:endParaRPr lang="en-US" sz="2000" b="1" dirty="0"/>
+          </a:p>
+        </p:txBody>
+      </p:sp>
+      <p:pic>
+        <p:nvPicPr>
+          <p:cNvPr id="5" name="Picture 4"/>
+          <p:cNvPicPr>
+            <a:picLocks noChangeAspect="1"/>
+          </p:cNvPicPr>
+          <p:nvPr/>
+        </p:nvPicPr>
+        <p:blipFill>
+          <a:blip r:embed="rId2">
+            <a:extLst>
+              <a:ext uri="{28A0092B-C50C-407E-A947-70E740481C1C}">
+                <a14:useLocalDpi xmlns:a14="http://schemas.microsoft.com/office/drawing/2010/main" val="0"/>
+              </a:ext>
+            </a:extLst>
+          </a:blip>
+          <a:stretch>
+            <a:fillRect/>
+          </a:stretch>
+        </p:blipFill>
+        <p:spPr>
+          <a:xfrm>
+            <a:off x="3257550" y="2057198"/>
+            <a:ext cx="5810250" cy="4120744"/>
+          </a:xfrm>
+          <a:prstGeom prst="rect">
+            <a:avLst/>
+          </a:prstGeom>
+        </p:spPr>
+      </p:pic>
+    </p:spTree>
+    <p:extLst>
+      <p:ext uri="{BB962C8B-B14F-4D97-AF65-F5344CB8AC3E}">
+        <p14:creationId xmlns:p14="http://schemas.microsoft.com/office/powerpoint/2010/main" val="3523976319"/>
+      </p:ext>
+    </p:extLst>
+  </p:cSld>
+  <p:clrMapOvr>
+    <a:masterClrMapping/>
+  </p:clrMapOvr>
+  <p:timing>
+    <p:tnLst>
+      <p:par>
+        <p:cTn id="1" dur="indefinite" restart="never" nodeType="tmRoot"/>
+      </p:par>
+    </p:tnLst>
+  </p:timing>
+</p:sld>
+</file>
+
+<file path=ppt/slides/slide27.xml><?xml version="1.0" encoding="utf-8"?>
+<p:sld xmlns:a="http://schemas.openxmlformats.org/drawingml/2006/main" xmlns:r="http://schemas.openxmlformats.org/officeDocument/2006/relationships" xmlns:p="http://schemas.openxmlformats.org/presentationml/2006/main">
+  <p:cSld>
+    <p:spTree>
+      <p:nvGrpSpPr>
+        <p:cNvPr id="1" name=""/>
+        <p:cNvGrpSpPr/>
+        <p:nvPr/>
+      </p:nvGrpSpPr>
+      <p:grpSpPr>
+        <a:xfrm>
+          <a:off x="0" y="0"/>
+          <a:ext cx="0" cy="0"/>
+          <a:chOff x="0" y="0"/>
+          <a:chExt cx="0" cy="0"/>
+        </a:xfrm>
+      </p:grpSpPr>
+      <p:sp>
+        <p:nvSpPr>
+          <p:cNvPr id="2" name="Title 1"/>
+          <p:cNvSpPr>
+            <a:spLocks noGrp="1"/>
+          </p:cNvSpPr>
+          <p:nvPr>
+            <p:ph type="title"/>
+          </p:nvPr>
+        </p:nvSpPr>
+        <p:spPr/>
+        <p:txBody>
+          <a:bodyPr/>
+          <a:lstStyle/>
+          <a:p>
+            <a:endParaRPr lang="en-US"/>
+          </a:p>
+        </p:txBody>
+      </p:sp>
+      <p:pic>
+        <p:nvPicPr>
+          <p:cNvPr id="7" name="Content Placeholder 6"/>
+          <p:cNvPicPr>
+            <a:picLocks noGrp="1" noChangeAspect="1"/>
+          </p:cNvPicPr>
+          <p:nvPr>
+            <p:ph idx="1"/>
+          </p:nvPr>
+        </p:nvPicPr>
+        <p:blipFill>
+          <a:blip r:embed="rId2"/>
+          <a:stretch>
+            <a:fillRect/>
+          </a:stretch>
+        </p:blipFill>
+        <p:spPr>
+          <a:xfrm>
+            <a:off x="954776" y="1254125"/>
+            <a:ext cx="10503799" cy="4351338"/>
+          </a:xfrm>
+          <a:prstGeom prst="rect">
+            <a:avLst/>
+          </a:prstGeom>
+        </p:spPr>
+      </p:pic>
+    </p:spTree>
+    <p:extLst>
+      <p:ext uri="{BB962C8B-B14F-4D97-AF65-F5344CB8AC3E}">
+        <p14:creationId xmlns:p14="http://schemas.microsoft.com/office/powerpoint/2010/main" val="70349680"/>
+      </p:ext>
+    </p:extLst>
+  </p:cSld>
+  <p:clrMapOvr>
+    <a:masterClrMapping/>
+  </p:clrMapOvr>
+  <p:timing>
+    <p:tnLst>
+      <p:par>
+        <p:cTn id="1" dur="indefinite" restart="never" nodeType="tmRoot"/>
+      </p:par>
+    </p:tnLst>
+  </p:timing>
+</p:sld>
+</file>
+
+<file path=ppt/slides/slide28.xml><?xml version="1.0" encoding="utf-8"?>
+<p:sld xmlns:a="http://schemas.openxmlformats.org/drawingml/2006/main" xmlns:r="http://schemas.openxmlformats.org/officeDocument/2006/relationships" xmlns:p="http://schemas.openxmlformats.org/presentationml/2006/main">
+  <p:cSld>
+    <p:spTree>
+      <p:nvGrpSpPr>
+        <p:cNvPr id="1" name=""/>
+        <p:cNvGrpSpPr/>
+        <p:nvPr/>
+      </p:nvGrpSpPr>
+      <p:grpSpPr>
+        <a:xfrm>
+          <a:off x="0" y="0"/>
+          <a:ext cx="0" cy="0"/>
+          <a:chOff x="0" y="0"/>
+          <a:chExt cx="0" cy="0"/>
+        </a:xfrm>
+      </p:grpSpPr>
+      <p:sp>
+        <p:nvSpPr>
+          <p:cNvPr id="2" name="Title 1"/>
+          <p:cNvSpPr>
+            <a:spLocks noGrp="1"/>
+          </p:cNvSpPr>
+          <p:nvPr>
+            <p:ph type="title"/>
+          </p:nvPr>
+        </p:nvSpPr>
+        <p:spPr/>
+        <p:txBody>
+          <a:bodyPr/>
+          <a:lstStyle/>
+          <a:p>
+            <a:endParaRPr lang="en-US"/>
+          </a:p>
+        </p:txBody>
+      </p:sp>
+      <p:pic>
+        <p:nvPicPr>
+          <p:cNvPr id="4" name="Content Placeholder 3"/>
+          <p:cNvPicPr>
+            <a:picLocks noGrp="1" noChangeAspect="1"/>
+          </p:cNvPicPr>
+          <p:nvPr>
+            <p:ph idx="1"/>
+          </p:nvPr>
+        </p:nvPicPr>
+        <p:blipFill>
+          <a:blip r:embed="rId2">
+            <a:extLst>
+              <a:ext uri="{28A0092B-C50C-407E-A947-70E740481C1C}">
+                <a14:useLocalDpi xmlns:a14="http://schemas.microsoft.com/office/drawing/2010/main" val="0"/>
+              </a:ext>
+            </a:extLst>
+          </a:blip>
+          <a:stretch>
+            <a:fillRect/>
+          </a:stretch>
+        </p:blipFill>
+        <p:spPr>
+          <a:xfrm>
+            <a:off x="1601787" y="1027906"/>
+            <a:ext cx="8702676" cy="4351338"/>
+          </a:xfrm>
+        </p:spPr>
+      </p:pic>
+    </p:spTree>
+    <p:extLst>
+      <p:ext uri="{BB962C8B-B14F-4D97-AF65-F5344CB8AC3E}">
+        <p14:creationId xmlns:p14="http://schemas.microsoft.com/office/powerpoint/2010/main" val="3450206662"/>
+      </p:ext>
+    </p:extLst>
+  </p:cSld>
+  <p:clrMapOvr>
+    <a:masterClrMapping/>
+  </p:clrMapOvr>
+  <p:timing>
+    <p:tnLst>
+      <p:par>
+        <p:cTn id="1" dur="indefinite" restart="never" nodeType="tmRoot"/>
+      </p:par>
+    </p:tnLst>
+  </p:timing>
+</p:sld>
+</file>
+
+<file path=ppt/slides/slide29.xml><?xml version="1.0" encoding="utf-8"?>
+<p:sld xmlns:a="http://schemas.openxmlformats.org/drawingml/2006/main" xmlns:r="http://schemas.openxmlformats.org/officeDocument/2006/relationships" xmlns:p="http://schemas.openxmlformats.org/presentationml/2006/main">
+  <p:cSld>
+    <p:spTree>
+      <p:nvGrpSpPr>
+        <p:cNvPr id="1" name=""/>
+        <p:cNvGrpSpPr/>
+        <p:nvPr/>
+      </p:nvGrpSpPr>
+      <p:grpSpPr>
+        <a:xfrm>
+          <a:off x="0" y="0"/>
+          <a:ext cx="0" cy="0"/>
+          <a:chOff x="0" y="0"/>
+          <a:chExt cx="0" cy="0"/>
+        </a:xfrm>
+      </p:grpSpPr>
+      <p:sp>
+        <p:nvSpPr>
+          <p:cNvPr id="2" name="Title 1"/>
+          <p:cNvSpPr>
+            <a:spLocks noGrp="1"/>
+          </p:cNvSpPr>
+          <p:nvPr>
+            <p:ph type="ctrTitle"/>
+          </p:nvPr>
+        </p:nvSpPr>
+        <p:spPr>
+          <a:xfrm>
+            <a:off x="1039956" y="1550050"/>
+            <a:ext cx="9970944" cy="2327419"/>
+          </a:xfrm>
+        </p:spPr>
+        <p:txBody>
+          <a:bodyPr>
+            <a:normAutofit/>
+          </a:bodyPr>
+          <a:lstStyle/>
+          <a:p>
+            <a:r>
+              <a:rPr lang="en-US" b="1" dirty="0" smtClean="0"/>
+              <a:t>4. </a:t>
+            </a:r>
+            <a:r>
+              <a:rPr lang="en-US" b="1" dirty="0" err="1" smtClean="0"/>
+              <a:t>Phân</a:t>
+            </a:r>
+            <a:r>
+              <a:rPr lang="en-US" b="1" dirty="0" smtClean="0"/>
+              <a:t> </a:t>
+            </a:r>
+            <a:r>
+              <a:rPr lang="en-US" b="1" dirty="0" err="1" smtClean="0"/>
+              <a:t>tích</a:t>
+            </a:r>
+            <a:r>
+              <a:rPr lang="en-US" b="1" dirty="0" smtClean="0"/>
+              <a:t> </a:t>
+            </a:r>
+            <a:r>
+              <a:rPr lang="en-US" b="1" dirty="0" err="1" smtClean="0"/>
+              <a:t>dữ</a:t>
+            </a:r>
+            <a:r>
+              <a:rPr lang="en-US" b="1" dirty="0" smtClean="0"/>
+              <a:t> </a:t>
+            </a:r>
+            <a:r>
+              <a:rPr lang="en-US" b="1" dirty="0" err="1" smtClean="0"/>
+              <a:t>liệu</a:t>
+            </a:r>
+            <a:r>
+              <a:rPr lang="en-US" b="1" dirty="0" smtClean="0"/>
+              <a:t> </a:t>
+            </a:r>
+            <a:r>
+              <a:rPr lang="en-US" b="1" dirty="0" err="1" smtClean="0"/>
+              <a:t>sơ</a:t>
+            </a:r>
+            <a:r>
+              <a:rPr lang="en-US" b="1" dirty="0" smtClean="0"/>
+              <a:t> </a:t>
+            </a:r>
+            <a:r>
+              <a:rPr lang="en-US" b="1" dirty="0" err="1" smtClean="0"/>
+              <a:t>bộ</a:t>
+            </a:r>
+            <a:r>
+              <a:rPr lang="en-US" b="1" dirty="0" smtClean="0"/>
+              <a:t> - EDA</a:t>
+            </a:r>
+            <a:endParaRPr lang="en-US" b="1" dirty="0"/>
+          </a:p>
+        </p:txBody>
+      </p:sp>
+      <p:sp>
+        <p:nvSpPr>
+          <p:cNvPr id="3" name="Subtitle 2"/>
+          <p:cNvSpPr>
+            <a:spLocks noGrp="1"/>
+          </p:cNvSpPr>
+          <p:nvPr>
+            <p:ph type="subTitle" idx="1"/>
+          </p:nvPr>
+        </p:nvSpPr>
+        <p:spPr/>
+        <p:txBody>
+          <a:bodyPr/>
+          <a:lstStyle/>
+          <a:p>
+            <a:endParaRPr lang="en-US"/>
+          </a:p>
+        </p:txBody>
+      </p:sp>
+    </p:spTree>
+    <p:extLst>
+      <p:ext uri="{BB962C8B-B14F-4D97-AF65-F5344CB8AC3E}">
+        <p14:creationId xmlns:p14="http://schemas.microsoft.com/office/powerpoint/2010/main" val="189065287"/>
       </p:ext>
     </p:extLst>
   </p:cSld>
@@ -3447,6 +6856,91 @@
 </p:sld>
 </file>
 
+<file path=ppt/slides/slide30.xml><?xml version="1.0" encoding="utf-8"?>
+<p:sld xmlns:a="http://schemas.openxmlformats.org/drawingml/2006/main" xmlns:r="http://schemas.openxmlformats.org/officeDocument/2006/relationships" xmlns:p="http://schemas.openxmlformats.org/presentationml/2006/main">
+  <p:cSld>
+    <p:spTree>
+      <p:nvGrpSpPr>
+        <p:cNvPr id="1" name=""/>
+        <p:cNvGrpSpPr/>
+        <p:nvPr/>
+      </p:nvGrpSpPr>
+      <p:grpSpPr>
+        <a:xfrm>
+          <a:off x="0" y="0"/>
+          <a:ext cx="0" cy="0"/>
+          <a:chOff x="0" y="0"/>
+          <a:chExt cx="0" cy="0"/>
+        </a:xfrm>
+      </p:grpSpPr>
+      <p:sp>
+        <p:nvSpPr>
+          <p:cNvPr id="2" name="Title 1"/>
+          <p:cNvSpPr>
+            <a:spLocks noGrp="1"/>
+          </p:cNvSpPr>
+          <p:nvPr>
+            <p:ph type="title"/>
+          </p:nvPr>
+        </p:nvSpPr>
+        <p:spPr/>
+        <p:txBody>
+          <a:bodyPr/>
+          <a:lstStyle/>
+          <a:p>
+            <a:endParaRPr lang="en-US"/>
+          </a:p>
+        </p:txBody>
+      </p:sp>
+      <p:pic>
+        <p:nvPicPr>
+          <p:cNvPr id="8" name="Content Placeholder 7"/>
+          <p:cNvPicPr>
+            <a:picLocks noGrp="1" noChangeAspect="1"/>
+          </p:cNvPicPr>
+          <p:nvPr>
+            <p:ph idx="1"/>
+          </p:nvPr>
+        </p:nvPicPr>
+        <p:blipFill>
+          <a:blip r:embed="rId2">
+            <a:extLst>
+              <a:ext uri="{28A0092B-C50C-407E-A947-70E740481C1C}">
+                <a14:useLocalDpi xmlns:a14="http://schemas.microsoft.com/office/drawing/2010/main" val="0"/>
+              </a:ext>
+            </a:extLst>
+          </a:blip>
+          <a:stretch>
+            <a:fillRect/>
+          </a:stretch>
+        </p:blipFill>
+        <p:spPr>
+          <a:xfrm>
+            <a:off x="1895475" y="786606"/>
+            <a:ext cx="8597886" cy="5204619"/>
+          </a:xfrm>
+        </p:spPr>
+      </p:pic>
+    </p:spTree>
+    <p:extLst>
+      <p:ext uri="{BB962C8B-B14F-4D97-AF65-F5344CB8AC3E}">
+        <p14:creationId xmlns:p14="http://schemas.microsoft.com/office/powerpoint/2010/main" val="1961036672"/>
+      </p:ext>
+    </p:extLst>
+  </p:cSld>
+  <p:clrMapOvr>
+    <a:masterClrMapping/>
+  </p:clrMapOvr>
+  <p:timing>
+    <p:tnLst>
+      <p:par>
+        <p:cTn id="1" dur="indefinite" restart="never" nodeType="tmRoot"/>
+      </p:par>
+    </p:tnLst>
+  </p:timing>
+</p:sld>
+</file>
+
 <file path=ppt/slides/slide4.xml><?xml version="1.0" encoding="utf-8"?>
 <p:sld xmlns:a="http://schemas.openxmlformats.org/drawingml/2006/main" xmlns:r="http://schemas.openxmlformats.org/officeDocument/2006/relationships" xmlns:p="http://schemas.openxmlformats.org/presentationml/2006/main">
   <p:cSld>
@@ -3479,13 +6973,128 @@
           <a:bodyPr/>
           <a:lstStyle/>
           <a:p>
+            <a:r>
+              <a:rPr lang="en-US" b="1" dirty="0"/>
+              <a:t>1. </a:t>
+            </a:r>
+            <a:r>
+              <a:rPr lang="en-US" b="1" dirty="0" err="1"/>
+              <a:t>Giới</a:t>
+            </a:r>
+            <a:r>
+              <a:rPr lang="en-US" b="1" dirty="0"/>
+              <a:t> </a:t>
+            </a:r>
+            <a:r>
+              <a:rPr lang="en-US" b="1" dirty="0" err="1"/>
+              <a:t>thiệu</a:t>
+            </a:r>
+            <a:r>
+              <a:rPr lang="en-US" b="1" dirty="0"/>
+              <a:t> </a:t>
+            </a:r>
+            <a:r>
+              <a:rPr lang="en-US" b="1" dirty="0" err="1"/>
+              <a:t>về</a:t>
+            </a:r>
+            <a:r>
+              <a:rPr lang="en-US" b="1" dirty="0"/>
+              <a:t> AI</a:t>
+            </a:r>
+            <a:endParaRPr lang="en-US" b="1" dirty="0"/>
+          </a:p>
+        </p:txBody>
+      </p:sp>
+      <p:sp>
+        <p:nvSpPr>
+          <p:cNvPr id="3" name="Content Placeholder 2"/>
+          <p:cNvSpPr>
+            <a:spLocks noGrp="1"/>
+          </p:cNvSpPr>
+          <p:nvPr>
+            <p:ph idx="1"/>
+          </p:nvPr>
+        </p:nvSpPr>
+        <p:spPr/>
+        <p:txBody>
+          <a:bodyPr/>
+          <a:lstStyle/>
+          <a:p>
+            <a:r>
+              <a:rPr lang="en-US" dirty="0" err="1" smtClean="0"/>
+              <a:t>Khái</a:t>
+            </a:r>
+            <a:r>
+              <a:rPr lang="en-US" dirty="0" smtClean="0"/>
+              <a:t> </a:t>
+            </a:r>
+            <a:r>
+              <a:rPr lang="en-US" dirty="0" err="1" smtClean="0"/>
+              <a:t>niệm</a:t>
+            </a:r>
+            <a:endParaRPr lang="en-US" dirty="0"/>
+          </a:p>
+        </p:txBody>
+      </p:sp>
+    </p:spTree>
+    <p:extLst>
+      <p:ext uri="{BB962C8B-B14F-4D97-AF65-F5344CB8AC3E}">
+        <p14:creationId xmlns:p14="http://schemas.microsoft.com/office/powerpoint/2010/main" val="933742677"/>
+      </p:ext>
+    </p:extLst>
+  </p:cSld>
+  <p:clrMapOvr>
+    <a:masterClrMapping/>
+  </p:clrMapOvr>
+  <p:timing>
+    <p:tnLst>
+      <p:par>
+        <p:cTn id="1" dur="indefinite" restart="never" nodeType="tmRoot"/>
+      </p:par>
+    </p:tnLst>
+  </p:timing>
+</p:sld>
+</file>
+
+<file path=ppt/slides/slide5.xml><?xml version="1.0" encoding="utf-8"?>
+<p:sld xmlns:a="http://schemas.openxmlformats.org/drawingml/2006/main" xmlns:r="http://schemas.openxmlformats.org/officeDocument/2006/relationships" xmlns:p="http://schemas.openxmlformats.org/presentationml/2006/main">
+  <p:cSld>
+    <p:spTree>
+      <p:nvGrpSpPr>
+        <p:cNvPr id="1" name=""/>
+        <p:cNvGrpSpPr/>
+        <p:nvPr/>
+      </p:nvGrpSpPr>
+      <p:grpSpPr>
+        <a:xfrm>
+          <a:off x="0" y="0"/>
+          <a:ext cx="0" cy="0"/>
+          <a:chOff x="0" y="0"/>
+          <a:chExt cx="0" cy="0"/>
+        </a:xfrm>
+      </p:grpSpPr>
+      <p:sp>
+        <p:nvSpPr>
+          <p:cNvPr id="2" name="Title 1"/>
+          <p:cNvSpPr>
+            <a:spLocks noGrp="1"/>
+          </p:cNvSpPr>
+          <p:nvPr>
+            <p:ph type="title"/>
+          </p:nvPr>
+        </p:nvSpPr>
+        <p:spPr/>
+        <p:txBody>
+          <a:bodyPr/>
+          <a:lstStyle/>
+          <a:p>
             <a:endParaRPr lang="en-US"/>
           </a:p>
         </p:txBody>
       </p:sp>
       <p:pic>
         <p:nvPicPr>
-          <p:cNvPr id="6" name="Content Placeholder 5"/>
+          <p:cNvPr id="4" name="Content Placeholder 3"/>
           <p:cNvPicPr>
             <a:picLocks noGrp="1" noChangeAspect="1"/>
           </p:cNvPicPr>
@@ -3494,7 +7103,7 @@
           </p:nvPr>
         </p:nvPicPr>
         <p:blipFill>
-          <a:blip r:embed="rId2" cstate="print">
+          <a:blip r:embed="rId2">
             <a:extLst>
               <a:ext uri="{28A0092B-C50C-407E-A947-70E740481C1C}">
                 <a14:useLocalDpi xmlns:a14="http://schemas.microsoft.com/office/drawing/2010/main" val="0"/>
@@ -3507,93 +7116,15 @@
         </p:blipFill>
         <p:spPr>
           <a:xfrm>
-            <a:off x="2228144" y="955187"/>
-            <a:ext cx="7735712" cy="4351338"/>
+            <a:off x="2037482" y="1092703"/>
+            <a:ext cx="7734117" cy="4343819"/>
           </a:xfrm>
         </p:spPr>
       </p:pic>
-      <p:sp>
-        <p:nvSpPr>
-          <p:cNvPr id="7" name="TextBox 6"/>
-          <p:cNvSpPr txBox="1"/>
-          <p:nvPr/>
-        </p:nvSpPr>
-        <p:spPr>
-          <a:xfrm>
-            <a:off x="6096000" y="5627077"/>
-            <a:ext cx="2925673" cy="369332"/>
-          </a:xfrm>
-          <a:prstGeom prst="rect">
-            <a:avLst/>
-          </a:prstGeom>
-          <a:noFill/>
-        </p:spPr>
-        <p:txBody>
-          <a:bodyPr wrap="none" rtlCol="0">
-            <a:spAutoFit/>
-          </a:bodyPr>
-          <a:lstStyle/>
-          <a:p>
-            <a:r>
-              <a:rPr lang="en-US" i="1" dirty="0" err="1"/>
-              <a:t>T</a:t>
-            </a:r>
-            <a:r>
-              <a:rPr lang="en-US" i="1" dirty="0" err="1" smtClean="0"/>
-              <a:t>rợ</a:t>
-            </a:r>
-            <a:r>
-              <a:rPr lang="en-US" i="1" dirty="0" smtClean="0"/>
-              <a:t> </a:t>
-            </a:r>
-            <a:r>
-              <a:rPr lang="en-US" i="1" dirty="0" err="1" smtClean="0"/>
-              <a:t>lý</a:t>
-            </a:r>
-            <a:r>
-              <a:rPr lang="en-US" i="1" dirty="0" smtClean="0"/>
-              <a:t> </a:t>
-            </a:r>
-            <a:r>
-              <a:rPr lang="en-US" i="1" dirty="0" err="1" smtClean="0"/>
-              <a:t>trí</a:t>
-            </a:r>
-            <a:r>
-              <a:rPr lang="en-US" i="1" dirty="0" smtClean="0"/>
-              <a:t> </a:t>
-            </a:r>
-            <a:r>
-              <a:rPr lang="en-US" i="1" dirty="0" err="1" smtClean="0"/>
-              <a:t>tuệ</a:t>
-            </a:r>
-            <a:r>
-              <a:rPr lang="en-US" i="1" dirty="0" smtClean="0"/>
-              <a:t> </a:t>
-            </a:r>
-            <a:r>
-              <a:rPr lang="en-US" i="1" dirty="0" err="1" smtClean="0"/>
-              <a:t>nhân</a:t>
-            </a:r>
-            <a:r>
-              <a:rPr lang="en-US" i="1" dirty="0" smtClean="0"/>
-              <a:t> </a:t>
-            </a:r>
-            <a:r>
-              <a:rPr lang="en-US" i="1" dirty="0" err="1" smtClean="0"/>
-              <a:t>tạo</a:t>
-            </a:r>
-            <a:r>
-              <a:rPr lang="en-US" i="1" dirty="0" smtClean="0"/>
-              <a:t> Gemini</a:t>
-            </a:r>
-            <a:endParaRPr lang="en-US" i="1" dirty="0"/>
-          </a:p>
-        </p:txBody>
-      </p:sp>
     </p:spTree>
     <p:extLst>
       <p:ext uri="{BB962C8B-B14F-4D97-AF65-F5344CB8AC3E}">
-        <p14:creationId xmlns:p14="http://schemas.microsoft.com/office/powerpoint/2010/main" val="3558805423"/>
+        <p14:creationId xmlns:p14="http://schemas.microsoft.com/office/powerpoint/2010/main" val="722057650"/>
       </p:ext>
     </p:extLst>
   </p:cSld>
@@ -3603,80 +7134,834 @@
   <p:timing>
     <p:tnLst>
       <p:par>
-        <p:cTn id="1" dur="indefinite" restart="never" nodeType="tmRoot">
-          <p:childTnLst>
-            <p:seq concurrent="1" nextAc="seek">
-              <p:cTn id="2" restart="whenNotActive" fill="hold" evtFilter="cancelBubble" nodeType="interactiveSeq">
-                <p:stCondLst>
-                  <p:cond evt="onClick" delay="0">
-                    <p:tgtEl>
-                      <p:spTgt spid="9"/>
-                    </p:tgtEl>
-                  </p:cond>
-                </p:stCondLst>
-                <p:endSync evt="end" delay="0">
-                  <p:rtn val="all"/>
-                </p:endSync>
-                <p:childTnLst>
-                  <p:par>
-                    <p:cTn id="3" fill="hold">
-                      <p:stCondLst>
-                        <p:cond delay="0"/>
-                      </p:stCondLst>
-                      <p:childTnLst>
-                        <p:par>
-                          <p:cTn id="4" fill="hold">
-                            <p:stCondLst>
-                              <p:cond delay="0"/>
-                            </p:stCondLst>
-                            <p:childTnLst>
-                              <p:par>
-                                <p:cTn id="5" presetID="2" presetClass="mediacall" presetSubtype="0" fill="hold" nodeType="clickEffect">
-                                  <p:stCondLst>
-                                    <p:cond delay="0"/>
-                                  </p:stCondLst>
-                                  <p:childTnLst>
-                                    <p:cmd type="call" cmd="togglePause">
-                                      <p:cBhvr>
-                                        <p:cTn id="6" dur="1" fill="hold"/>
-                                        <p:tgtEl>
-                                          <p:spTgt spid="9"/>
-                                        </p:tgtEl>
-                                      </p:cBhvr>
-                                    </p:cmd>
-                                  </p:childTnLst>
-                                </p:cTn>
-                              </p:par>
-                            </p:childTnLst>
-                          </p:cTn>
-                        </p:par>
-                      </p:childTnLst>
-                    </p:cTn>
-                  </p:par>
-                </p:childTnLst>
-              </p:cTn>
-              <p:nextCondLst>
-                <p:cond evt="onClick" delay="0">
-                  <p:tgtEl>
-                    <p:spTgt spid="9"/>
-                  </p:tgtEl>
-                </p:cond>
-              </p:nextCondLst>
-            </p:seq>
-            <p:video>
-              <p:cMediaNode vol="80000">
-                <p:cTn id="7" fill="hold" display="0">
-                  <p:stCondLst>
-                    <p:cond delay="indefinite"/>
-                  </p:stCondLst>
-                </p:cTn>
-                <p:tgtEl>
-                  <p:spTgt spid="9"/>
-                </p:tgtEl>
-              </p:cMediaNode>
-            </p:video>
-          </p:childTnLst>
-        </p:cTn>
+        <p:cTn id="1" dur="indefinite" restart="never" nodeType="tmRoot"/>
+      </p:par>
+    </p:tnLst>
+  </p:timing>
+</p:sld>
+</file>
+
+<file path=ppt/slides/slide6.xml><?xml version="1.0" encoding="utf-8"?>
+<p:sld xmlns:a="http://schemas.openxmlformats.org/drawingml/2006/main" xmlns:r="http://schemas.openxmlformats.org/officeDocument/2006/relationships" xmlns:p="http://schemas.openxmlformats.org/presentationml/2006/main">
+  <p:cSld>
+    <p:spTree>
+      <p:nvGrpSpPr>
+        <p:cNvPr id="1" name=""/>
+        <p:cNvGrpSpPr/>
+        <p:nvPr/>
+      </p:nvGrpSpPr>
+      <p:grpSpPr>
+        <a:xfrm>
+          <a:off x="0" y="0"/>
+          <a:ext cx="0" cy="0"/>
+          <a:chOff x="0" y="0"/>
+          <a:chExt cx="0" cy="0"/>
+        </a:xfrm>
+      </p:grpSpPr>
+      <p:sp>
+        <p:nvSpPr>
+          <p:cNvPr id="2" name="Title 1"/>
+          <p:cNvSpPr>
+            <a:spLocks noGrp="1"/>
+          </p:cNvSpPr>
+          <p:nvPr>
+            <p:ph type="title"/>
+          </p:nvPr>
+        </p:nvSpPr>
+        <p:spPr/>
+        <p:txBody>
+          <a:bodyPr/>
+          <a:lstStyle/>
+          <a:p>
+            <a:r>
+              <a:rPr lang="en-US" b="1" dirty="0"/>
+              <a:t>1. </a:t>
+            </a:r>
+            <a:r>
+              <a:rPr lang="en-US" b="1" dirty="0" err="1"/>
+              <a:t>Giới</a:t>
+            </a:r>
+            <a:r>
+              <a:rPr lang="en-US" b="1" dirty="0"/>
+              <a:t> </a:t>
+            </a:r>
+            <a:r>
+              <a:rPr lang="en-US" b="1" dirty="0" err="1"/>
+              <a:t>thiệu</a:t>
+            </a:r>
+            <a:r>
+              <a:rPr lang="en-US" b="1" dirty="0"/>
+              <a:t> </a:t>
+            </a:r>
+            <a:r>
+              <a:rPr lang="en-US" b="1" dirty="0" err="1"/>
+              <a:t>về</a:t>
+            </a:r>
+            <a:r>
+              <a:rPr lang="en-US" b="1" dirty="0"/>
+              <a:t> AI</a:t>
+            </a:r>
+            <a:endParaRPr lang="en-US" b="1" dirty="0"/>
+          </a:p>
+        </p:txBody>
+      </p:sp>
+      <p:sp>
+        <p:nvSpPr>
+          <p:cNvPr id="3" name="Content Placeholder 2"/>
+          <p:cNvSpPr>
+            <a:spLocks noGrp="1"/>
+          </p:cNvSpPr>
+          <p:nvPr>
+            <p:ph idx="1"/>
+          </p:nvPr>
+        </p:nvSpPr>
+        <p:spPr/>
+        <p:txBody>
+          <a:bodyPr/>
+          <a:lstStyle/>
+          <a:p>
+            <a:r>
+              <a:rPr lang="en-US" dirty="0" err="1" smtClean="0"/>
+              <a:t>Khái</a:t>
+            </a:r>
+            <a:r>
+              <a:rPr lang="en-US" dirty="0" smtClean="0"/>
+              <a:t> </a:t>
+            </a:r>
+            <a:r>
+              <a:rPr lang="en-US" dirty="0" err="1" smtClean="0"/>
+              <a:t>niệm</a:t>
+            </a:r>
+            <a:endParaRPr lang="en-US" dirty="0" smtClean="0"/>
+          </a:p>
+          <a:p>
+            <a:r>
+              <a:rPr lang="en-US" dirty="0" err="1" smtClean="0"/>
+              <a:t>Lĩnh</a:t>
+            </a:r>
+            <a:r>
+              <a:rPr lang="en-US" dirty="0" smtClean="0"/>
+              <a:t> </a:t>
+            </a:r>
+            <a:r>
+              <a:rPr lang="en-US" dirty="0" err="1" smtClean="0"/>
+              <a:t>vực</a:t>
+            </a:r>
+            <a:r>
+              <a:rPr lang="en-US" dirty="0" smtClean="0"/>
+              <a:t> </a:t>
+            </a:r>
+            <a:r>
+              <a:rPr lang="en-US" dirty="0" err="1" smtClean="0"/>
+              <a:t>chính</a:t>
+            </a:r>
+            <a:r>
+              <a:rPr lang="en-US" dirty="0" smtClean="0"/>
+              <a:t>: ML, DL, NLP, Computer Vision, Robotics</a:t>
+            </a:r>
+          </a:p>
+        </p:txBody>
+      </p:sp>
+    </p:spTree>
+    <p:extLst>
+      <p:ext uri="{BB962C8B-B14F-4D97-AF65-F5344CB8AC3E}">
+        <p14:creationId xmlns:p14="http://schemas.microsoft.com/office/powerpoint/2010/main" val="490944251"/>
+      </p:ext>
+    </p:extLst>
+  </p:cSld>
+  <p:clrMapOvr>
+    <a:masterClrMapping/>
+  </p:clrMapOvr>
+  <p:timing>
+    <p:tnLst>
+      <p:par>
+        <p:cTn id="1" dur="indefinite" restart="never" nodeType="tmRoot"/>
+      </p:par>
+    </p:tnLst>
+  </p:timing>
+</p:sld>
+</file>
+
+<file path=ppt/slides/slide7.xml><?xml version="1.0" encoding="utf-8"?>
+<p:sld xmlns:a="http://schemas.openxmlformats.org/drawingml/2006/main" xmlns:r="http://schemas.openxmlformats.org/officeDocument/2006/relationships" xmlns:p="http://schemas.openxmlformats.org/presentationml/2006/main">
+  <p:cSld>
+    <p:spTree>
+      <p:nvGrpSpPr>
+        <p:cNvPr id="1" name=""/>
+        <p:cNvGrpSpPr/>
+        <p:nvPr/>
+      </p:nvGrpSpPr>
+      <p:grpSpPr>
+        <a:xfrm>
+          <a:off x="0" y="0"/>
+          <a:ext cx="0" cy="0"/>
+          <a:chOff x="0" y="0"/>
+          <a:chExt cx="0" cy="0"/>
+        </a:xfrm>
+      </p:grpSpPr>
+      <p:sp>
+        <p:nvSpPr>
+          <p:cNvPr id="2" name="Title 1"/>
+          <p:cNvSpPr>
+            <a:spLocks noGrp="1"/>
+          </p:cNvSpPr>
+          <p:nvPr>
+            <p:ph type="title"/>
+          </p:nvPr>
+        </p:nvSpPr>
+        <p:spPr/>
+        <p:txBody>
+          <a:bodyPr/>
+          <a:lstStyle/>
+          <a:p>
+            <a:endParaRPr lang="en-US"/>
+          </a:p>
+        </p:txBody>
+      </p:sp>
+      <p:pic>
+        <p:nvPicPr>
+          <p:cNvPr id="4" name="Content Placeholder 3"/>
+          <p:cNvPicPr>
+            <a:picLocks noGrp="1" noChangeAspect="1"/>
+          </p:cNvPicPr>
+          <p:nvPr>
+            <p:ph idx="1"/>
+          </p:nvPr>
+        </p:nvPicPr>
+        <p:blipFill>
+          <a:blip r:embed="rId2">
+            <a:extLst>
+              <a:ext uri="{28A0092B-C50C-407E-A947-70E740481C1C}">
+                <a14:useLocalDpi xmlns:a14="http://schemas.microsoft.com/office/drawing/2010/main" val="0"/>
+              </a:ext>
+            </a:extLst>
+          </a:blip>
+          <a:stretch>
+            <a:fillRect/>
+          </a:stretch>
+        </p:blipFill>
+        <p:spPr>
+          <a:xfrm>
+            <a:off x="2237104" y="1027906"/>
+            <a:ext cx="7717791" cy="4823620"/>
+          </a:xfrm>
+        </p:spPr>
+      </p:pic>
+    </p:spTree>
+    <p:extLst>
+      <p:ext uri="{BB962C8B-B14F-4D97-AF65-F5344CB8AC3E}">
+        <p14:creationId xmlns:p14="http://schemas.microsoft.com/office/powerpoint/2010/main" val="3654279437"/>
+      </p:ext>
+    </p:extLst>
+  </p:cSld>
+  <p:clrMapOvr>
+    <a:masterClrMapping/>
+  </p:clrMapOvr>
+  <p:timing>
+    <p:tnLst>
+      <p:par>
+        <p:cTn id="1" dur="indefinite" restart="never" nodeType="tmRoot"/>
+      </p:par>
+    </p:tnLst>
+  </p:timing>
+</p:sld>
+</file>
+
+<file path=ppt/slides/slide8.xml><?xml version="1.0" encoding="utf-8"?>
+<p:sld xmlns:a="http://schemas.openxmlformats.org/drawingml/2006/main" xmlns:r="http://schemas.openxmlformats.org/officeDocument/2006/relationships" xmlns:p="http://schemas.openxmlformats.org/presentationml/2006/main">
+  <p:cSld>
+    <p:spTree>
+      <p:nvGrpSpPr>
+        <p:cNvPr id="1" name=""/>
+        <p:cNvGrpSpPr/>
+        <p:nvPr/>
+      </p:nvGrpSpPr>
+      <p:grpSpPr>
+        <a:xfrm>
+          <a:off x="0" y="0"/>
+          <a:ext cx="0" cy="0"/>
+          <a:chOff x="0" y="0"/>
+          <a:chExt cx="0" cy="0"/>
+        </a:xfrm>
+      </p:grpSpPr>
+      <p:sp>
+        <p:nvSpPr>
+          <p:cNvPr id="2" name="Title 1"/>
+          <p:cNvSpPr>
+            <a:spLocks noGrp="1"/>
+          </p:cNvSpPr>
+          <p:nvPr>
+            <p:ph type="title"/>
+          </p:nvPr>
+        </p:nvSpPr>
+        <p:spPr/>
+        <p:txBody>
+          <a:bodyPr/>
+          <a:lstStyle/>
+          <a:p>
+            <a:r>
+              <a:rPr lang="en-US" b="1" dirty="0"/>
+              <a:t>1. </a:t>
+            </a:r>
+            <a:r>
+              <a:rPr lang="en-US" b="1" dirty="0" err="1"/>
+              <a:t>Giới</a:t>
+            </a:r>
+            <a:r>
+              <a:rPr lang="en-US" b="1" dirty="0"/>
+              <a:t> </a:t>
+            </a:r>
+            <a:r>
+              <a:rPr lang="en-US" b="1" dirty="0" err="1"/>
+              <a:t>thiệu</a:t>
+            </a:r>
+            <a:r>
+              <a:rPr lang="en-US" b="1" dirty="0"/>
+              <a:t> </a:t>
+            </a:r>
+            <a:r>
+              <a:rPr lang="en-US" b="1" dirty="0" err="1"/>
+              <a:t>về</a:t>
+            </a:r>
+            <a:r>
+              <a:rPr lang="en-US" b="1" dirty="0"/>
+              <a:t> AI</a:t>
+            </a:r>
+            <a:endParaRPr lang="en-US" b="1" dirty="0"/>
+          </a:p>
+        </p:txBody>
+      </p:sp>
+      <p:sp>
+        <p:nvSpPr>
+          <p:cNvPr id="3" name="Content Placeholder 2"/>
+          <p:cNvSpPr>
+            <a:spLocks noGrp="1"/>
+          </p:cNvSpPr>
+          <p:nvPr>
+            <p:ph idx="1"/>
+          </p:nvPr>
+        </p:nvSpPr>
+        <p:spPr/>
+        <p:txBody>
+          <a:bodyPr/>
+          <a:lstStyle/>
+          <a:p>
+            <a:r>
+              <a:rPr lang="en-US" dirty="0" err="1" smtClean="0"/>
+              <a:t>Khái</a:t>
+            </a:r>
+            <a:r>
+              <a:rPr lang="en-US" dirty="0" smtClean="0"/>
+              <a:t> </a:t>
+            </a:r>
+            <a:r>
+              <a:rPr lang="en-US" dirty="0" err="1" smtClean="0"/>
+              <a:t>niệm</a:t>
+            </a:r>
+            <a:endParaRPr lang="en-US" dirty="0" smtClean="0"/>
+          </a:p>
+          <a:p>
+            <a:r>
+              <a:rPr lang="en-US" dirty="0" err="1" smtClean="0"/>
+              <a:t>Lĩnh</a:t>
+            </a:r>
+            <a:r>
+              <a:rPr lang="en-US" dirty="0" smtClean="0"/>
+              <a:t> </a:t>
+            </a:r>
+            <a:r>
+              <a:rPr lang="en-US" dirty="0" err="1" smtClean="0"/>
+              <a:t>vực</a:t>
+            </a:r>
+            <a:r>
+              <a:rPr lang="en-US" dirty="0" smtClean="0"/>
+              <a:t> </a:t>
+            </a:r>
+            <a:r>
+              <a:rPr lang="en-US" dirty="0" err="1" smtClean="0"/>
+              <a:t>chính</a:t>
+            </a:r>
+            <a:r>
+              <a:rPr lang="en-US" dirty="0" smtClean="0"/>
+              <a:t>: ML, DL, NLP, Computer Vision, Robotics</a:t>
+            </a:r>
+          </a:p>
+          <a:p>
+            <a:r>
+              <a:rPr lang="en-US" dirty="0" err="1" smtClean="0"/>
+              <a:t>Ứng</a:t>
+            </a:r>
+            <a:r>
+              <a:rPr lang="en-US" dirty="0" smtClean="0"/>
+              <a:t> </a:t>
+            </a:r>
+            <a:r>
+              <a:rPr lang="en-US" dirty="0" err="1" smtClean="0"/>
+              <a:t>dụng</a:t>
+            </a:r>
+            <a:r>
+              <a:rPr lang="en-US" dirty="0" smtClean="0"/>
+              <a:t> </a:t>
+            </a:r>
+            <a:r>
+              <a:rPr lang="en-US" dirty="0" err="1" smtClean="0"/>
+              <a:t>của</a:t>
+            </a:r>
+            <a:r>
+              <a:rPr lang="en-US" dirty="0" smtClean="0"/>
+              <a:t> AI</a:t>
+            </a:r>
+          </a:p>
+        </p:txBody>
+      </p:sp>
+    </p:spTree>
+    <p:extLst>
+      <p:ext uri="{BB962C8B-B14F-4D97-AF65-F5344CB8AC3E}">
+        <p14:creationId xmlns:p14="http://schemas.microsoft.com/office/powerpoint/2010/main" val="592073721"/>
+      </p:ext>
+    </p:extLst>
+  </p:cSld>
+  <p:clrMapOvr>
+    <a:masterClrMapping/>
+  </p:clrMapOvr>
+  <p:timing>
+    <p:tnLst>
+      <p:par>
+        <p:cTn id="1" dur="indefinite" restart="never" nodeType="tmRoot"/>
+      </p:par>
+    </p:tnLst>
+  </p:timing>
+</p:sld>
+</file>
+
+<file path=ppt/slides/slide9.xml><?xml version="1.0" encoding="utf-8"?>
+<p:sld xmlns:a="http://schemas.openxmlformats.org/drawingml/2006/main" xmlns:r="http://schemas.openxmlformats.org/officeDocument/2006/relationships" xmlns:p="http://schemas.openxmlformats.org/presentationml/2006/main">
+  <p:cSld>
+    <p:spTree>
+      <p:nvGrpSpPr>
+        <p:cNvPr id="1" name=""/>
+        <p:cNvGrpSpPr/>
+        <p:nvPr/>
+      </p:nvGrpSpPr>
+      <p:grpSpPr>
+        <a:xfrm>
+          <a:off x="0" y="0"/>
+          <a:ext cx="0" cy="0"/>
+          <a:chOff x="0" y="0"/>
+          <a:chExt cx="0" cy="0"/>
+        </a:xfrm>
+      </p:grpSpPr>
+      <p:sp>
+        <p:nvSpPr>
+          <p:cNvPr id="2" name="Title 1"/>
+          <p:cNvSpPr>
+            <a:spLocks noGrp="1"/>
+          </p:cNvSpPr>
+          <p:nvPr>
+            <p:ph type="title"/>
+          </p:nvPr>
+        </p:nvSpPr>
+        <p:spPr/>
+        <p:txBody>
+          <a:bodyPr/>
+          <a:lstStyle/>
+          <a:p>
+            <a:endParaRPr lang="en-US" dirty="0"/>
+          </a:p>
+        </p:txBody>
+      </p:sp>
+      <p:pic>
+        <p:nvPicPr>
+          <p:cNvPr id="4" name="Content Placeholder 3"/>
+          <p:cNvPicPr>
+            <a:picLocks noGrp="1" noChangeAspect="1"/>
+          </p:cNvPicPr>
+          <p:nvPr>
+            <p:ph idx="1"/>
+          </p:nvPr>
+        </p:nvPicPr>
+        <p:blipFill>
+          <a:blip r:embed="rId2">
+            <a:extLst>
+              <a:ext uri="{28A0092B-C50C-407E-A947-70E740481C1C}">
+                <a14:useLocalDpi xmlns:a14="http://schemas.microsoft.com/office/drawing/2010/main" val="0"/>
+              </a:ext>
+            </a:extLst>
+          </a:blip>
+          <a:stretch>
+            <a:fillRect/>
+          </a:stretch>
+        </p:blipFill>
+        <p:spPr>
+          <a:xfrm>
+            <a:off x="6517178" y="365125"/>
+            <a:ext cx="5408465" cy="5896731"/>
+          </a:xfrm>
+        </p:spPr>
+      </p:pic>
+      <p:pic>
+        <p:nvPicPr>
+          <p:cNvPr id="6" name="Picture 5"/>
+          <p:cNvPicPr>
+            <a:picLocks noChangeAspect="1"/>
+          </p:cNvPicPr>
+          <p:nvPr/>
+        </p:nvPicPr>
+        <p:blipFill>
+          <a:blip r:embed="rId3">
+            <a:extLst>
+              <a:ext uri="{28A0092B-C50C-407E-A947-70E740481C1C}">
+                <a14:useLocalDpi xmlns:a14="http://schemas.microsoft.com/office/drawing/2010/main" val="0"/>
+              </a:ext>
+            </a:extLst>
+          </a:blip>
+          <a:stretch>
+            <a:fillRect/>
+          </a:stretch>
+        </p:blipFill>
+        <p:spPr>
+          <a:xfrm>
+            <a:off x="902741" y="1204711"/>
+            <a:ext cx="4689071" cy="4689071"/>
+          </a:xfrm>
+          <a:prstGeom prst="rect">
+            <a:avLst/>
+          </a:prstGeom>
+        </p:spPr>
+      </p:pic>
+      <p:sp>
+        <p:nvSpPr>
+          <p:cNvPr id="7" name="TextBox 6"/>
+          <p:cNvSpPr txBox="1"/>
+          <p:nvPr/>
+        </p:nvSpPr>
+        <p:spPr>
+          <a:xfrm>
+            <a:off x="1637607" y="4779818"/>
+            <a:ext cx="3830985" cy="369332"/>
+          </a:xfrm>
+          <a:prstGeom prst="rect">
+            <a:avLst/>
+          </a:prstGeom>
+          <a:noFill/>
+        </p:spPr>
+        <p:txBody>
+          <a:bodyPr wrap="none" rtlCol="0">
+            <a:spAutoFit/>
+          </a:bodyPr>
+          <a:lstStyle/>
+          <a:p>
+            <a:r>
+              <a:rPr lang="en-US" i="1" dirty="0" err="1" smtClean="0">
+                <a:solidFill>
+                  <a:schemeClr val="tx1">
+                    <a:lumMod val="65000"/>
+                    <a:lumOff val="35000"/>
+                  </a:schemeClr>
+                </a:solidFill>
+              </a:rPr>
+              <a:t>Nền</a:t>
+            </a:r>
+            <a:r>
+              <a:rPr lang="en-US" i="1" dirty="0" smtClean="0">
+                <a:solidFill>
+                  <a:schemeClr val="tx1">
+                    <a:lumMod val="65000"/>
+                    <a:lumOff val="35000"/>
+                  </a:schemeClr>
+                </a:solidFill>
+              </a:rPr>
+              <a:t> </a:t>
+            </a:r>
+            <a:r>
+              <a:rPr lang="en-US" i="1" dirty="0" err="1" smtClean="0">
+                <a:solidFill>
+                  <a:schemeClr val="tx1">
+                    <a:lumMod val="65000"/>
+                    <a:lumOff val="35000"/>
+                  </a:schemeClr>
+                </a:solidFill>
+              </a:rPr>
+              <a:t>tảng</a:t>
+            </a:r>
+            <a:r>
+              <a:rPr lang="en-US" i="1" dirty="0" smtClean="0">
+                <a:solidFill>
+                  <a:schemeClr val="tx1">
+                    <a:lumMod val="65000"/>
+                    <a:lumOff val="35000"/>
+                  </a:schemeClr>
+                </a:solidFill>
+              </a:rPr>
+              <a:t> </a:t>
+            </a:r>
+            <a:r>
+              <a:rPr lang="en-US" i="1" dirty="0" err="1" smtClean="0">
+                <a:solidFill>
+                  <a:schemeClr val="tx1">
+                    <a:lumMod val="65000"/>
+                    <a:lumOff val="35000"/>
+                  </a:schemeClr>
+                </a:solidFill>
+              </a:rPr>
+              <a:t>trí</a:t>
+            </a:r>
+            <a:r>
+              <a:rPr lang="en-US" i="1" dirty="0" smtClean="0">
+                <a:solidFill>
+                  <a:schemeClr val="tx1">
+                    <a:lumMod val="65000"/>
+                    <a:lumOff val="35000"/>
+                  </a:schemeClr>
+                </a:solidFill>
+              </a:rPr>
+              <a:t> </a:t>
+            </a:r>
+            <a:r>
+              <a:rPr lang="en-US" i="1" dirty="0" err="1" smtClean="0">
+                <a:solidFill>
+                  <a:schemeClr val="tx1">
+                    <a:lumMod val="65000"/>
+                    <a:lumOff val="35000"/>
+                  </a:schemeClr>
+                </a:solidFill>
+              </a:rPr>
+              <a:t>tuệ</a:t>
+            </a:r>
+            <a:r>
+              <a:rPr lang="en-US" i="1" dirty="0" smtClean="0">
+                <a:solidFill>
+                  <a:schemeClr val="tx1">
+                    <a:lumMod val="65000"/>
+                    <a:lumOff val="35000"/>
+                  </a:schemeClr>
+                </a:solidFill>
+              </a:rPr>
+              <a:t> </a:t>
+            </a:r>
+            <a:r>
+              <a:rPr lang="en-US" i="1" dirty="0" err="1" smtClean="0">
+                <a:solidFill>
+                  <a:schemeClr val="tx1">
+                    <a:lumMod val="65000"/>
+                    <a:lumOff val="35000"/>
+                  </a:schemeClr>
+                </a:solidFill>
+              </a:rPr>
+              <a:t>nhân</a:t>
+            </a:r>
+            <a:r>
+              <a:rPr lang="en-US" i="1" dirty="0" smtClean="0">
+                <a:solidFill>
+                  <a:schemeClr val="tx1">
+                    <a:lumMod val="65000"/>
+                    <a:lumOff val="35000"/>
+                  </a:schemeClr>
+                </a:solidFill>
+              </a:rPr>
+              <a:t> </a:t>
+            </a:r>
+            <a:r>
+              <a:rPr lang="en-US" i="1" dirty="0" err="1" smtClean="0">
+                <a:solidFill>
+                  <a:schemeClr val="tx1">
+                    <a:lumMod val="65000"/>
+                    <a:lumOff val="35000"/>
+                  </a:schemeClr>
+                </a:solidFill>
+              </a:rPr>
+              <a:t>tạo</a:t>
+            </a:r>
+            <a:r>
+              <a:rPr lang="en-US" i="1" dirty="0" smtClean="0">
+                <a:solidFill>
+                  <a:schemeClr val="tx1">
+                    <a:lumMod val="65000"/>
+                    <a:lumOff val="35000"/>
+                  </a:schemeClr>
+                </a:solidFill>
+              </a:rPr>
+              <a:t> IBM Watson</a:t>
+            </a:r>
+            <a:endParaRPr lang="en-US" i="1" dirty="0">
+              <a:solidFill>
+                <a:schemeClr val="tx1">
+                  <a:lumMod val="65000"/>
+                  <a:lumOff val="35000"/>
+                </a:schemeClr>
+              </a:solidFill>
+            </a:endParaRPr>
+          </a:p>
+        </p:txBody>
+      </p:sp>
+      <p:sp>
+        <p:nvSpPr>
+          <p:cNvPr id="8" name="TextBox 7"/>
+          <p:cNvSpPr txBox="1"/>
+          <p:nvPr/>
+        </p:nvSpPr>
+        <p:spPr>
+          <a:xfrm>
+            <a:off x="7710804" y="6338456"/>
+            <a:ext cx="3021212" cy="369332"/>
+          </a:xfrm>
+          <a:prstGeom prst="rect">
+            <a:avLst/>
+          </a:prstGeom>
+          <a:noFill/>
+        </p:spPr>
+        <p:txBody>
+          <a:bodyPr wrap="none" rtlCol="0">
+            <a:spAutoFit/>
+          </a:bodyPr>
+          <a:lstStyle/>
+          <a:p>
+            <a:r>
+              <a:rPr lang="en-US" i="1" dirty="0" err="1" smtClean="0">
+                <a:solidFill>
+                  <a:schemeClr val="tx1">
+                    <a:lumMod val="65000"/>
+                    <a:lumOff val="35000"/>
+                  </a:schemeClr>
+                </a:solidFill>
+              </a:rPr>
+              <a:t>Ứng</a:t>
+            </a:r>
+            <a:r>
+              <a:rPr lang="en-US" i="1" dirty="0" smtClean="0">
+                <a:solidFill>
+                  <a:schemeClr val="tx1">
+                    <a:lumMod val="65000"/>
+                    <a:lumOff val="35000"/>
+                  </a:schemeClr>
+                </a:solidFill>
+              </a:rPr>
+              <a:t> </a:t>
+            </a:r>
+            <a:r>
+              <a:rPr lang="en-US" i="1" dirty="0" err="1" smtClean="0">
+                <a:solidFill>
+                  <a:schemeClr val="tx1">
+                    <a:lumMod val="65000"/>
+                    <a:lumOff val="35000"/>
+                  </a:schemeClr>
+                </a:solidFill>
+              </a:rPr>
+              <a:t>dụng</a:t>
+            </a:r>
+            <a:r>
+              <a:rPr lang="en-US" i="1" dirty="0" smtClean="0">
+                <a:solidFill>
+                  <a:schemeClr val="tx1">
+                    <a:lumMod val="65000"/>
+                    <a:lumOff val="35000"/>
+                  </a:schemeClr>
+                </a:solidFill>
+              </a:rPr>
+              <a:t> </a:t>
+            </a:r>
+            <a:r>
+              <a:rPr lang="en-US" i="1" dirty="0" err="1" smtClean="0">
+                <a:solidFill>
+                  <a:schemeClr val="tx1">
+                    <a:lumMod val="65000"/>
+                    <a:lumOff val="35000"/>
+                  </a:schemeClr>
+                </a:solidFill>
+              </a:rPr>
+              <a:t>của</a:t>
+            </a:r>
+            <a:r>
+              <a:rPr lang="en-US" i="1" dirty="0" smtClean="0">
+                <a:solidFill>
+                  <a:schemeClr val="tx1">
+                    <a:lumMod val="65000"/>
+                    <a:lumOff val="35000"/>
+                  </a:schemeClr>
+                </a:solidFill>
+              </a:rPr>
+              <a:t> AI </a:t>
+            </a:r>
+            <a:r>
+              <a:rPr lang="en-US" i="1" dirty="0" err="1" smtClean="0">
+                <a:solidFill>
+                  <a:schemeClr val="tx1">
+                    <a:lumMod val="65000"/>
+                    <a:lumOff val="35000"/>
+                  </a:schemeClr>
+                </a:solidFill>
+              </a:rPr>
+              <a:t>trong</a:t>
+            </a:r>
+            <a:r>
+              <a:rPr lang="en-US" i="1" dirty="0" smtClean="0">
+                <a:solidFill>
+                  <a:schemeClr val="tx1">
+                    <a:lumMod val="65000"/>
+                    <a:lumOff val="35000"/>
+                  </a:schemeClr>
+                </a:solidFill>
+              </a:rPr>
+              <a:t> </a:t>
+            </a:r>
+            <a:r>
+              <a:rPr lang="en-US" i="1" dirty="0" err="1" smtClean="0">
+                <a:solidFill>
+                  <a:schemeClr val="tx1">
+                    <a:lumMod val="65000"/>
+                    <a:lumOff val="35000"/>
+                  </a:schemeClr>
+                </a:solidFill>
+              </a:rPr>
+              <a:t>thực</a:t>
+            </a:r>
+            <a:r>
+              <a:rPr lang="en-US" i="1" dirty="0" smtClean="0">
+                <a:solidFill>
+                  <a:schemeClr val="tx1">
+                    <a:lumMod val="65000"/>
+                    <a:lumOff val="35000"/>
+                  </a:schemeClr>
+                </a:solidFill>
+              </a:rPr>
+              <a:t> </a:t>
+            </a:r>
+            <a:r>
+              <a:rPr lang="en-US" i="1" dirty="0" err="1" smtClean="0">
+                <a:solidFill>
+                  <a:schemeClr val="tx1">
+                    <a:lumMod val="65000"/>
+                    <a:lumOff val="35000"/>
+                  </a:schemeClr>
+                </a:solidFill>
+              </a:rPr>
+              <a:t>tế</a:t>
+            </a:r>
+            <a:endParaRPr lang="en-US" i="1" dirty="0">
+              <a:solidFill>
+                <a:schemeClr val="tx1">
+                  <a:lumMod val="65000"/>
+                  <a:lumOff val="35000"/>
+                </a:schemeClr>
+              </a:solidFill>
+            </a:endParaRPr>
+          </a:p>
+        </p:txBody>
+      </p:sp>
+    </p:spTree>
+    <p:extLst>
+      <p:ext uri="{BB962C8B-B14F-4D97-AF65-F5344CB8AC3E}">
+        <p14:creationId xmlns:p14="http://schemas.microsoft.com/office/powerpoint/2010/main" val="4214565354"/>
+      </p:ext>
+    </p:extLst>
+  </p:cSld>
+  <p:clrMapOvr>
+    <a:masterClrMapping/>
+  </p:clrMapOvr>
+  <p:timing>
+    <p:tnLst>
+      <p:par>
+        <p:cTn id="1" dur="indefinite" restart="never" nodeType="tmRoot"/>
       </p:par>
     </p:tnLst>
   </p:timing>
